--- a/DAT5003-S2_24-AirQuality-ST20285213-TomRowan_PRES1.pptx
+++ b/DAT5003-S2_24-AirQuality-ST20285213-TomRowan_PRES1.pptx
@@ -17,8 +17,6 @@
     <p:sldId id="263" r:id="rId11"/>
     <p:sldId id="264" r:id="rId12"/>
     <p:sldId id="270" r:id="rId13"/>
-    <p:sldId id="269" r:id="rId14"/>
-    <p:sldId id="258" r:id="rId15"/>
   </p:sldIdLst>
   <p:sldSz cx="12192000" cy="6858000"/>
   <p:notesSz cx="6858000" cy="9144000"/>
@@ -18010,250 +18008,6 @@
 </p:sld>
 </file>
 
-<file path=ppt/slides/slide13.xml><?xml version="1.0" encoding="utf-8"?>
-<p:sld xmlns:a="http://schemas.openxmlformats.org/drawingml/2006/main" xmlns:r="http://schemas.openxmlformats.org/officeDocument/2006/relationships" xmlns:p="http://schemas.openxmlformats.org/presentationml/2006/main">
-  <p:cSld>
-    <p:bg>
-      <p:bgPr>
-        <a:solidFill>
-          <a:schemeClr val="bg1"/>
-        </a:solidFill>
-        <a:effectLst/>
-      </p:bgPr>
-    </p:bg>
-    <p:spTree>
-      <p:nvGrpSpPr>
-        <p:cNvPr id="1" name="">
-          <a:extLst>
-            <a:ext uri="{FF2B5EF4-FFF2-40B4-BE49-F238E27FC236}">
-              <a16:creationId xmlns:a16="http://schemas.microsoft.com/office/drawing/2014/main" id="{1D852D6F-4EAD-5AC6-025A-CA32F793DB39}"/>
-            </a:ext>
-          </a:extLst>
-        </p:cNvPr>
-        <p:cNvGrpSpPr/>
-        <p:nvPr/>
-      </p:nvGrpSpPr>
-      <p:grpSpPr>
-        <a:xfrm>
-          <a:off x="0" y="0"/>
-          <a:ext cx="0" cy="0"/>
-          <a:chOff x="0" y="0"/>
-          <a:chExt cx="0" cy="0"/>
-        </a:xfrm>
-      </p:grpSpPr>
-      <p:sp useBgFill="1">
-        <p:nvSpPr>
-          <p:cNvPr id="23" name="Rectangle 22">
-            <a:extLst>
-              <a:ext uri="{FF2B5EF4-FFF2-40B4-BE49-F238E27FC236}">
-                <a16:creationId xmlns:a16="http://schemas.microsoft.com/office/drawing/2014/main" id="{6C4028FD-8BAA-4A19-BFDE-594D991B7552}"/>
-              </a:ext>
-              <a:ext uri="{C183D7F6-B498-43B3-948B-1728B52AA6E4}">
-                <adec:decorative xmlns:adec="http://schemas.microsoft.com/office/drawing/2017/decorative" val="1"/>
-              </a:ext>
-            </a:extLst>
-          </p:cNvPr>
-          <p:cNvSpPr>
-            <a:spLocks noGrp="1" noRot="1" noChangeAspect="1" noMove="1" noResize="1" noEditPoints="1" noAdjustHandles="1" noChangeArrowheads="1" noChangeShapeType="1" noTextEdit="1"/>
-          </p:cNvSpPr>
-          <p:nvPr>
-            <p:extLst>
-              <p:ext uri="{386F3935-93C4-4BCD-93E2-E3B085C9AB24}">
-                <p16:designElem xmlns:p16="http://schemas.microsoft.com/office/powerpoint/2015/main" val="1"/>
-              </p:ext>
-            </p:extLst>
-          </p:nvPr>
-        </p:nvSpPr>
-        <p:spPr>
-          <a:xfrm>
-            <a:off x="-1" y="0"/>
-            <a:ext cx="12188952" cy="6858000"/>
-          </a:xfrm>
-          <a:prstGeom prst="rect">
-            <a:avLst/>
-          </a:prstGeom>
-          <a:ln>
-            <a:noFill/>
-          </a:ln>
-        </p:spPr>
-        <p:style>
-          <a:lnRef idx="2">
-            <a:schemeClr val="accent1">
-              <a:shade val="50000"/>
-            </a:schemeClr>
-          </a:lnRef>
-          <a:fillRef idx="1">
-            <a:schemeClr val="accent1"/>
-          </a:fillRef>
-          <a:effectRef idx="0">
-            <a:schemeClr val="accent1"/>
-          </a:effectRef>
-          <a:fontRef idx="minor">
-            <a:schemeClr val="lt1"/>
-          </a:fontRef>
-        </p:style>
-        <p:txBody>
-          <a:bodyPr rtlCol="0" anchor="ctr"/>
-          <a:lstStyle/>
-          <a:p>
-            <a:pPr algn="ctr"/>
-            <a:endParaRPr lang="en-US"/>
-          </a:p>
-        </p:txBody>
-      </p:sp>
-      <p:sp>
-        <p:nvSpPr>
-          <p:cNvPr id="2" name="Title 1">
-            <a:extLst>
-              <a:ext uri="{FF2B5EF4-FFF2-40B4-BE49-F238E27FC236}">
-                <a16:creationId xmlns:a16="http://schemas.microsoft.com/office/drawing/2014/main" id="{D84D4D7B-7244-8599-387A-6F5AF9532110}"/>
-              </a:ext>
-            </a:extLst>
-          </p:cNvPr>
-          <p:cNvSpPr>
-            <a:spLocks noGrp="1"/>
-          </p:cNvSpPr>
-          <p:nvPr>
-            <p:ph type="title"/>
-          </p:nvPr>
-        </p:nvSpPr>
-        <p:spPr>
-          <a:xfrm>
-            <a:off x="838200" y="556995"/>
-            <a:ext cx="10515600" cy="1133693"/>
-          </a:xfrm>
-        </p:spPr>
-        <p:txBody>
-          <a:bodyPr>
-            <a:normAutofit/>
-          </a:bodyPr>
-          <a:lstStyle/>
-          <a:p>
-            <a:r>
-              <a:rPr lang="en-US" sz="5200"/>
-              <a:t>Limitations in the Dataset</a:t>
-            </a:r>
-          </a:p>
-        </p:txBody>
-      </p:sp>
-      <p:sp>
-        <p:nvSpPr>
-          <p:cNvPr id="5" name="Content Placeholder 4">
-            <a:extLst>
-              <a:ext uri="{FF2B5EF4-FFF2-40B4-BE49-F238E27FC236}">
-                <a16:creationId xmlns:a16="http://schemas.microsoft.com/office/drawing/2014/main" id="{9018F6FE-8478-7A8D-C140-6EDFF8E1ECBC}"/>
-              </a:ext>
-            </a:extLst>
-          </p:cNvPr>
-          <p:cNvSpPr>
-            <a:spLocks noGrp="1"/>
-          </p:cNvSpPr>
-          <p:nvPr>
-            <p:ph idx="1"/>
-          </p:nvPr>
-        </p:nvSpPr>
-        <p:spPr/>
-        <p:txBody>
-          <a:bodyPr/>
-          <a:lstStyle/>
-          <a:p>
-            <a:endParaRPr lang="en-US"/>
-          </a:p>
-        </p:txBody>
-      </p:sp>
-    </p:spTree>
-    <p:extLst>
-      <p:ext uri="{BB962C8B-B14F-4D97-AF65-F5344CB8AC3E}">
-        <p14:creationId xmlns:p14="http://schemas.microsoft.com/office/powerpoint/2010/main" val="572791607"/>
-      </p:ext>
-    </p:extLst>
-  </p:cSld>
-  <p:clrMapOvr>
-    <a:masterClrMapping/>
-  </p:clrMapOvr>
-</p:sld>
-</file>
-
-<file path=ppt/slides/slide14.xml><?xml version="1.0" encoding="utf-8"?>
-<p:sld xmlns:a="http://schemas.openxmlformats.org/drawingml/2006/main" xmlns:r="http://schemas.openxmlformats.org/officeDocument/2006/relationships" xmlns:p="http://schemas.openxmlformats.org/presentationml/2006/main">
-  <p:cSld>
-    <p:spTree>
-      <p:nvGrpSpPr>
-        <p:cNvPr id="1" name=""/>
-        <p:cNvGrpSpPr/>
-        <p:nvPr/>
-      </p:nvGrpSpPr>
-      <p:grpSpPr>
-        <a:xfrm>
-          <a:off x="0" y="0"/>
-          <a:ext cx="0" cy="0"/>
-          <a:chOff x="0" y="0"/>
-          <a:chExt cx="0" cy="0"/>
-        </a:xfrm>
-      </p:grpSpPr>
-      <p:sp>
-        <p:nvSpPr>
-          <p:cNvPr id="2" name="Title 1">
-            <a:extLst>
-              <a:ext uri="{FF2B5EF4-FFF2-40B4-BE49-F238E27FC236}">
-                <a16:creationId xmlns:a16="http://schemas.microsoft.com/office/drawing/2014/main" id="{6DDE8426-E922-70AD-67A7-343CD411DD53}"/>
-              </a:ext>
-            </a:extLst>
-          </p:cNvPr>
-          <p:cNvSpPr>
-            <a:spLocks noGrp="1"/>
-          </p:cNvSpPr>
-          <p:nvPr>
-            <p:ph type="title"/>
-          </p:nvPr>
-        </p:nvSpPr>
-        <p:spPr/>
-        <p:txBody>
-          <a:bodyPr/>
-          <a:lstStyle/>
-          <a:p>
-            <a:endParaRPr lang="en-US" dirty="0"/>
-          </a:p>
-        </p:txBody>
-      </p:sp>
-      <p:sp>
-        <p:nvSpPr>
-          <p:cNvPr id="3" name="Content Placeholder 2">
-            <a:extLst>
-              <a:ext uri="{FF2B5EF4-FFF2-40B4-BE49-F238E27FC236}">
-                <a16:creationId xmlns:a16="http://schemas.microsoft.com/office/drawing/2014/main" id="{2BB7A3CB-1101-EBAA-2697-753574F51A53}"/>
-              </a:ext>
-            </a:extLst>
-          </p:cNvPr>
-          <p:cNvSpPr>
-            <a:spLocks noGrp="1"/>
-          </p:cNvSpPr>
-          <p:nvPr>
-            <p:ph idx="1"/>
-          </p:nvPr>
-        </p:nvSpPr>
-        <p:spPr/>
-        <p:txBody>
-          <a:bodyPr/>
-          <a:lstStyle/>
-          <a:p>
-            <a:endParaRPr lang="en-US"/>
-          </a:p>
-        </p:txBody>
-      </p:sp>
-    </p:spTree>
-    <p:extLst>
-      <p:ext uri="{BB962C8B-B14F-4D97-AF65-F5344CB8AC3E}">
-        <p14:creationId xmlns:p14="http://schemas.microsoft.com/office/powerpoint/2010/main" val="3652022230"/>
-      </p:ext>
-    </p:extLst>
-  </p:cSld>
-  <p:clrMapOvr>
-    <a:masterClrMapping/>
-  </p:clrMapOvr>
-</p:sld>
-</file>
-
 <file path=ppt/slides/slide2.xml><?xml version="1.0" encoding="utf-8"?>
 <p:sld xmlns:a="http://schemas.openxmlformats.org/drawingml/2006/main" xmlns:r="http://schemas.openxmlformats.org/officeDocument/2006/relationships" xmlns:p="http://schemas.openxmlformats.org/presentationml/2006/main">
   <p:cSld>

--- a/DAT5003-S2_24-AirQuality-ST20285213-TomRowan_PRES1.pptx
+++ b/DAT5003-S2_24-AirQuality-ST20285213-TomRowan_PRES1.pptx
@@ -4,19 +4,21 @@
   <p:sldMasterIdLst>
     <p:sldMasterId id="2147483648" r:id="rId1"/>
   </p:sldMasterIdLst>
+  <p:notesMasterIdLst>
+    <p:notesMasterId r:id="rId13"/>
+  </p:notesMasterIdLst>
   <p:sldIdLst>
     <p:sldId id="256" r:id="rId2"/>
-    <p:sldId id="257" r:id="rId3"/>
-    <p:sldId id="259" r:id="rId4"/>
-    <p:sldId id="260" r:id="rId5"/>
-    <p:sldId id="265" r:id="rId6"/>
-    <p:sldId id="261" r:id="rId7"/>
-    <p:sldId id="262" r:id="rId8"/>
-    <p:sldId id="266" r:id="rId9"/>
-    <p:sldId id="267" r:id="rId10"/>
-    <p:sldId id="263" r:id="rId11"/>
-    <p:sldId id="264" r:id="rId12"/>
-    <p:sldId id="270" r:id="rId13"/>
+    <p:sldId id="259" r:id="rId3"/>
+    <p:sldId id="260" r:id="rId4"/>
+    <p:sldId id="265" r:id="rId5"/>
+    <p:sldId id="261" r:id="rId6"/>
+    <p:sldId id="262" r:id="rId7"/>
+    <p:sldId id="266" r:id="rId8"/>
+    <p:sldId id="267" r:id="rId9"/>
+    <p:sldId id="263" r:id="rId10"/>
+    <p:sldId id="264" r:id="rId11"/>
+    <p:sldId id="270" r:id="rId12"/>
   </p:sldIdLst>
   <p:sldSz cx="12192000" cy="6858000"/>
   <p:notesSz cx="6858000" cy="9144000"/>
@@ -4168,7 +4170,7 @@
   <dgm:whole/>
   <dgm:extLst>
     <a:ext uri="http://schemas.microsoft.com/office/drawing/2008/diagram">
-      <dsp:dataModelExt xmlns:dsp="http://schemas.microsoft.com/office/drawing/2008/diagram" relId="rId6" minVer="http://schemas.openxmlformats.org/drawingml/2006/diagram"/>
+      <dsp:dataModelExt xmlns:dsp="http://schemas.microsoft.com/office/drawing/2008/diagram" relId="rId7" minVer="http://schemas.openxmlformats.org/drawingml/2006/diagram"/>
     </a:ext>
   </dgm:extLst>
 </dgm:dataModel>
@@ -4317,18 +4319,18 @@
         <a:lstStyle/>
         <a:p>
           <a:r>
-            <a:rPr lang="en-GB"/>
+            <a:rPr lang="en-GB" dirty="0"/>
             <a:t>Is it possible to </a:t>
           </a:r>
           <a:r>
-            <a:rPr lang="en-GB" b="1"/>
+            <a:rPr lang="en-GB" b="1" dirty="0"/>
             <a:t>predict future pollution levels</a:t>
           </a:r>
           <a:r>
-            <a:rPr lang="en-GB"/>
+            <a:rPr lang="en-GB" dirty="0"/>
             <a:t> based on historical data? </a:t>
           </a:r>
-          <a:endParaRPr lang="en-US"/>
+          <a:endParaRPr lang="en-US" dirty="0"/>
         </a:p>
       </dgm:t>
     </dgm:pt>
@@ -4362,34 +4364,34 @@
         <a:lstStyle/>
         <a:p>
           <a:r>
-            <a:rPr lang="en-GB"/>
-            <a:t>And can this be used to </a:t>
+            <a:rPr lang="en-GB" dirty="0"/>
+            <a:t>And can this data be used to </a:t>
           </a:r>
           <a:r>
-            <a:rPr lang="en-GB" b="1"/>
+            <a:rPr lang="en-GB" b="1" dirty="0"/>
             <a:t>inform residents</a:t>
           </a:r>
           <a:r>
-            <a:rPr lang="en-GB"/>
+            <a:rPr lang="en-GB" dirty="0"/>
             <a:t> of the city about potentially </a:t>
           </a:r>
           <a:r>
-            <a:rPr lang="en-GB" b="1"/>
+            <a:rPr lang="en-GB" b="1" dirty="0"/>
             <a:t>risky times</a:t>
           </a:r>
           <a:r>
-            <a:rPr lang="en-GB"/>
+            <a:rPr lang="en-GB" dirty="0"/>
             <a:t>, and </a:t>
           </a:r>
           <a:r>
-            <a:rPr lang="en-GB" b="1"/>
+            <a:rPr lang="en-GB" b="1" dirty="0"/>
             <a:t>when to take precautions </a:t>
           </a:r>
           <a:r>
-            <a:rPr lang="en-GB"/>
+            <a:rPr lang="en-GB" dirty="0"/>
             <a:t>or to avoid going outside without a mask?</a:t>
           </a:r>
-          <a:endParaRPr lang="en-US"/>
+          <a:endParaRPr lang="en-US" dirty="0"/>
         </a:p>
       </dgm:t>
     </dgm:pt>
@@ -4569,7 +4571,7 @@
   <dgm:whole/>
   <dgm:extLst>
     <a:ext uri="http://schemas.microsoft.com/office/drawing/2008/diagram">
-      <dsp:dataModelExt xmlns:dsp="http://schemas.microsoft.com/office/drawing/2008/diagram" relId="rId6" minVer="http://schemas.openxmlformats.org/drawingml/2006/diagram"/>
+      <dsp:dataModelExt xmlns:dsp="http://schemas.microsoft.com/office/drawing/2008/diagram" relId="rId7" minVer="http://schemas.openxmlformats.org/drawingml/2006/diagram"/>
     </a:ext>
   </dgm:extLst>
 </dgm:dataModel>
@@ -6519,18 +6521,18 @@
             <a:buNone/>
           </a:pPr>
           <a:r>
-            <a:rPr lang="en-GB" sz="1700" kern="1200"/>
+            <a:rPr lang="en-GB" sz="1700" kern="1200" dirty="0"/>
             <a:t>Is it possible to </a:t>
           </a:r>
           <a:r>
-            <a:rPr lang="en-GB" sz="1700" b="1" kern="1200"/>
+            <a:rPr lang="en-GB" sz="1700" b="1" kern="1200" dirty="0"/>
             <a:t>predict future pollution levels</a:t>
           </a:r>
           <a:r>
-            <a:rPr lang="en-GB" sz="1700" kern="1200"/>
+            <a:rPr lang="en-GB" sz="1700" kern="1200" dirty="0"/>
             <a:t> based on historical data? </a:t>
           </a:r>
-          <a:endParaRPr lang="en-US" sz="1700" kern="1200"/>
+          <a:endParaRPr lang="en-US" sz="1700" kern="1200" dirty="0"/>
         </a:p>
         <a:p>
           <a:pPr marL="0" lvl="0" indent="0" algn="ctr" defTabSz="755650">
@@ -6546,34 +6548,34 @@
             <a:buNone/>
           </a:pPr>
           <a:r>
-            <a:rPr lang="en-GB" sz="1700" kern="1200"/>
-            <a:t>And can this be used to </a:t>
+            <a:rPr lang="en-GB" sz="1700" kern="1200" dirty="0"/>
+            <a:t>And can this data be used to </a:t>
           </a:r>
           <a:r>
-            <a:rPr lang="en-GB" sz="1700" b="1" kern="1200"/>
+            <a:rPr lang="en-GB" sz="1700" b="1" kern="1200" dirty="0"/>
             <a:t>inform residents</a:t>
           </a:r>
           <a:r>
-            <a:rPr lang="en-GB" sz="1700" kern="1200"/>
+            <a:rPr lang="en-GB" sz="1700" kern="1200" dirty="0"/>
             <a:t> of the city about potentially </a:t>
           </a:r>
           <a:r>
-            <a:rPr lang="en-GB" sz="1700" b="1" kern="1200"/>
+            <a:rPr lang="en-GB" sz="1700" b="1" kern="1200" dirty="0"/>
             <a:t>risky times</a:t>
           </a:r>
           <a:r>
-            <a:rPr lang="en-GB" sz="1700" kern="1200"/>
+            <a:rPr lang="en-GB" sz="1700" kern="1200" dirty="0"/>
             <a:t>, and </a:t>
           </a:r>
           <a:r>
-            <a:rPr lang="en-GB" sz="1700" b="1" kern="1200"/>
+            <a:rPr lang="en-GB" sz="1700" b="1" kern="1200" dirty="0"/>
             <a:t>when to take precautions </a:t>
           </a:r>
           <a:r>
-            <a:rPr lang="en-GB" sz="1700" kern="1200"/>
+            <a:rPr lang="en-GB" sz="1700" kern="1200" dirty="0"/>
             <a:t>or to avoid going outside without a mask?</a:t>
           </a:r>
-          <a:endParaRPr lang="en-US" sz="1700" kern="1200"/>
+          <a:endParaRPr lang="en-US" sz="1700" kern="1200" dirty="0"/>
         </a:p>
       </dsp:txBody>
       <dsp:txXfrm>
@@ -12721,6 +12723,701 @@
 </dgm:styleDef>
 </file>
 
+<file path=ppt/notesMasters/notesMaster1.xml><?xml version="1.0" encoding="utf-8"?>
+<p:notesMaster xmlns:a="http://schemas.openxmlformats.org/drawingml/2006/main" xmlns:r="http://schemas.openxmlformats.org/officeDocument/2006/relationships" xmlns:p="http://schemas.openxmlformats.org/presentationml/2006/main">
+  <p:cSld>
+    <p:bg>
+      <p:bgRef idx="1001">
+        <a:schemeClr val="bg1"/>
+      </p:bgRef>
+    </p:bg>
+    <p:spTree>
+      <p:nvGrpSpPr>
+        <p:cNvPr id="1" name=""/>
+        <p:cNvGrpSpPr/>
+        <p:nvPr/>
+      </p:nvGrpSpPr>
+      <p:grpSpPr>
+        <a:xfrm>
+          <a:off x="0" y="0"/>
+          <a:ext cx="0" cy="0"/>
+          <a:chOff x="0" y="0"/>
+          <a:chExt cx="0" cy="0"/>
+        </a:xfrm>
+      </p:grpSpPr>
+      <p:sp>
+        <p:nvSpPr>
+          <p:cNvPr id="2" name="Header Placeholder 1"/>
+          <p:cNvSpPr>
+            <a:spLocks noGrp="1"/>
+          </p:cNvSpPr>
+          <p:nvPr>
+            <p:ph type="hdr" sz="quarter"/>
+          </p:nvPr>
+        </p:nvSpPr>
+        <p:spPr>
+          <a:xfrm>
+            <a:off x="0" y="0"/>
+            <a:ext cx="2971800" cy="458788"/>
+          </a:xfrm>
+          <a:prstGeom prst="rect">
+            <a:avLst/>
+          </a:prstGeom>
+        </p:spPr>
+        <p:txBody>
+          <a:bodyPr vert="horz" lIns="91440" tIns="45720" rIns="91440" bIns="45720" rtlCol="0"/>
+          <a:lstStyle>
+            <a:lvl1pPr algn="l">
+              <a:defRPr sz="1200"/>
+            </a:lvl1pPr>
+          </a:lstStyle>
+          <a:p>
+            <a:endParaRPr lang="en-US"/>
+          </a:p>
+        </p:txBody>
+      </p:sp>
+      <p:sp>
+        <p:nvSpPr>
+          <p:cNvPr id="3" name="Date Placeholder 2"/>
+          <p:cNvSpPr>
+            <a:spLocks noGrp="1"/>
+          </p:cNvSpPr>
+          <p:nvPr>
+            <p:ph type="dt" idx="1"/>
+          </p:nvPr>
+        </p:nvSpPr>
+        <p:spPr>
+          <a:xfrm>
+            <a:off x="3884613" y="0"/>
+            <a:ext cx="2971800" cy="458788"/>
+          </a:xfrm>
+          <a:prstGeom prst="rect">
+            <a:avLst/>
+          </a:prstGeom>
+        </p:spPr>
+        <p:txBody>
+          <a:bodyPr vert="horz" lIns="91440" tIns="45720" rIns="91440" bIns="45720" rtlCol="0"/>
+          <a:lstStyle>
+            <a:lvl1pPr algn="r">
+              <a:defRPr sz="1200"/>
+            </a:lvl1pPr>
+          </a:lstStyle>
+          <a:p>
+            <a:fld id="{26BF61AF-0729-0449-9820-12AE88C0185A}" type="datetimeFigureOut">
+              <a:rPr lang="en-US" smtClean="0"/>
+              <a:t>6/2/25</a:t>
+            </a:fld>
+            <a:endParaRPr lang="en-US"/>
+          </a:p>
+        </p:txBody>
+      </p:sp>
+      <p:sp>
+        <p:nvSpPr>
+          <p:cNvPr id="4" name="Slide Image Placeholder 3"/>
+          <p:cNvSpPr>
+            <a:spLocks noGrp="1" noRot="1" noChangeAspect="1"/>
+          </p:cNvSpPr>
+          <p:nvPr>
+            <p:ph type="sldImg" idx="2"/>
+          </p:nvPr>
+        </p:nvSpPr>
+        <p:spPr>
+          <a:xfrm>
+            <a:off x="685800" y="1143000"/>
+            <a:ext cx="5486400" cy="3086100"/>
+          </a:xfrm>
+          <a:prstGeom prst="rect">
+            <a:avLst/>
+          </a:prstGeom>
+          <a:noFill/>
+          <a:ln w="12700">
+            <a:solidFill>
+              <a:prstClr val="black"/>
+            </a:solidFill>
+          </a:ln>
+        </p:spPr>
+        <p:txBody>
+          <a:bodyPr vert="horz" lIns="91440" tIns="45720" rIns="91440" bIns="45720" rtlCol="0" anchor="ctr"/>
+          <a:lstStyle/>
+          <a:p>
+            <a:endParaRPr lang="en-US"/>
+          </a:p>
+        </p:txBody>
+      </p:sp>
+      <p:sp>
+        <p:nvSpPr>
+          <p:cNvPr id="5" name="Notes Placeholder 4"/>
+          <p:cNvSpPr>
+            <a:spLocks noGrp="1"/>
+          </p:cNvSpPr>
+          <p:nvPr>
+            <p:ph type="body" sz="quarter" idx="3"/>
+          </p:nvPr>
+        </p:nvSpPr>
+        <p:spPr>
+          <a:xfrm>
+            <a:off x="685800" y="4400550"/>
+            <a:ext cx="5486400" cy="3600450"/>
+          </a:xfrm>
+          <a:prstGeom prst="rect">
+            <a:avLst/>
+          </a:prstGeom>
+        </p:spPr>
+        <p:txBody>
+          <a:bodyPr vert="horz" lIns="91440" tIns="45720" rIns="91440" bIns="45720" rtlCol="0"/>
+          <a:lstStyle/>
+          <a:p>
+            <a:pPr lvl="0"/>
+            <a:r>
+              <a:rPr lang="en-GB"/>
+              <a:t>Click to edit Master text styles</a:t>
+            </a:r>
+          </a:p>
+          <a:p>
+            <a:pPr lvl="1"/>
+            <a:r>
+              <a:rPr lang="en-GB"/>
+              <a:t>Second level</a:t>
+            </a:r>
+          </a:p>
+          <a:p>
+            <a:pPr lvl="2"/>
+            <a:r>
+              <a:rPr lang="en-GB"/>
+              <a:t>Third level</a:t>
+            </a:r>
+          </a:p>
+          <a:p>
+            <a:pPr lvl="3"/>
+            <a:r>
+              <a:rPr lang="en-GB"/>
+              <a:t>Fourth level</a:t>
+            </a:r>
+          </a:p>
+          <a:p>
+            <a:pPr lvl="4"/>
+            <a:r>
+              <a:rPr lang="en-GB"/>
+              <a:t>Fifth level</a:t>
+            </a:r>
+            <a:endParaRPr lang="en-US"/>
+          </a:p>
+        </p:txBody>
+      </p:sp>
+      <p:sp>
+        <p:nvSpPr>
+          <p:cNvPr id="6" name="Footer Placeholder 5"/>
+          <p:cNvSpPr>
+            <a:spLocks noGrp="1"/>
+          </p:cNvSpPr>
+          <p:nvPr>
+            <p:ph type="ftr" sz="quarter" idx="4"/>
+          </p:nvPr>
+        </p:nvSpPr>
+        <p:spPr>
+          <a:xfrm>
+            <a:off x="0" y="8685213"/>
+            <a:ext cx="2971800" cy="458787"/>
+          </a:xfrm>
+          <a:prstGeom prst="rect">
+            <a:avLst/>
+          </a:prstGeom>
+        </p:spPr>
+        <p:txBody>
+          <a:bodyPr vert="horz" lIns="91440" tIns="45720" rIns="91440" bIns="45720" rtlCol="0" anchor="b"/>
+          <a:lstStyle>
+            <a:lvl1pPr algn="l">
+              <a:defRPr sz="1200"/>
+            </a:lvl1pPr>
+          </a:lstStyle>
+          <a:p>
+            <a:endParaRPr lang="en-US"/>
+          </a:p>
+        </p:txBody>
+      </p:sp>
+      <p:sp>
+        <p:nvSpPr>
+          <p:cNvPr id="7" name="Slide Number Placeholder 6"/>
+          <p:cNvSpPr>
+            <a:spLocks noGrp="1"/>
+          </p:cNvSpPr>
+          <p:nvPr>
+            <p:ph type="sldNum" sz="quarter" idx="5"/>
+          </p:nvPr>
+        </p:nvSpPr>
+        <p:spPr>
+          <a:xfrm>
+            <a:off x="3884613" y="8685213"/>
+            <a:ext cx="2971800" cy="458787"/>
+          </a:xfrm>
+          <a:prstGeom prst="rect">
+            <a:avLst/>
+          </a:prstGeom>
+        </p:spPr>
+        <p:txBody>
+          <a:bodyPr vert="horz" lIns="91440" tIns="45720" rIns="91440" bIns="45720" rtlCol="0" anchor="b"/>
+          <a:lstStyle>
+            <a:lvl1pPr algn="r">
+              <a:defRPr sz="1200"/>
+            </a:lvl1pPr>
+          </a:lstStyle>
+          <a:p>
+            <a:fld id="{79A6C747-1210-A448-A00A-5DB36490E53F}" type="slidenum">
+              <a:rPr lang="en-US" smtClean="0"/>
+              <a:t>‹#›</a:t>
+            </a:fld>
+            <a:endParaRPr lang="en-US"/>
+          </a:p>
+        </p:txBody>
+      </p:sp>
+    </p:spTree>
+    <p:extLst>
+      <p:ext uri="{BB962C8B-B14F-4D97-AF65-F5344CB8AC3E}">
+        <p14:creationId xmlns:p14="http://schemas.microsoft.com/office/powerpoint/2010/main" val="1984293501"/>
+      </p:ext>
+    </p:extLst>
+  </p:cSld>
+  <p:clrMap bg1="lt1" tx1="dk1" bg2="lt2" tx2="dk2" accent1="accent1" accent2="accent2" accent3="accent3" accent4="accent4" accent5="accent5" accent6="accent6" hlink="hlink" folHlink="folHlink"/>
+  <p:notesStyle>
+    <a:lvl1pPr marL="0" algn="l" defTabSz="914400" rtl="0" eaLnBrk="1" latinLnBrk="0" hangingPunct="1">
+      <a:defRPr sz="1200" kern="1200">
+        <a:solidFill>
+          <a:schemeClr val="tx1"/>
+        </a:solidFill>
+        <a:latin typeface="+mn-lt"/>
+        <a:ea typeface="+mn-ea"/>
+        <a:cs typeface="+mn-cs"/>
+      </a:defRPr>
+    </a:lvl1pPr>
+    <a:lvl2pPr marL="457200" algn="l" defTabSz="914400" rtl="0" eaLnBrk="1" latinLnBrk="0" hangingPunct="1">
+      <a:defRPr sz="1200" kern="1200">
+        <a:solidFill>
+          <a:schemeClr val="tx1"/>
+        </a:solidFill>
+        <a:latin typeface="+mn-lt"/>
+        <a:ea typeface="+mn-ea"/>
+        <a:cs typeface="+mn-cs"/>
+      </a:defRPr>
+    </a:lvl2pPr>
+    <a:lvl3pPr marL="914400" algn="l" defTabSz="914400" rtl="0" eaLnBrk="1" latinLnBrk="0" hangingPunct="1">
+      <a:defRPr sz="1200" kern="1200">
+        <a:solidFill>
+          <a:schemeClr val="tx1"/>
+        </a:solidFill>
+        <a:latin typeface="+mn-lt"/>
+        <a:ea typeface="+mn-ea"/>
+        <a:cs typeface="+mn-cs"/>
+      </a:defRPr>
+    </a:lvl3pPr>
+    <a:lvl4pPr marL="1371600" algn="l" defTabSz="914400" rtl="0" eaLnBrk="1" latinLnBrk="0" hangingPunct="1">
+      <a:defRPr sz="1200" kern="1200">
+        <a:solidFill>
+          <a:schemeClr val="tx1"/>
+        </a:solidFill>
+        <a:latin typeface="+mn-lt"/>
+        <a:ea typeface="+mn-ea"/>
+        <a:cs typeface="+mn-cs"/>
+      </a:defRPr>
+    </a:lvl4pPr>
+    <a:lvl5pPr marL="1828800" algn="l" defTabSz="914400" rtl="0" eaLnBrk="1" latinLnBrk="0" hangingPunct="1">
+      <a:defRPr sz="1200" kern="1200">
+        <a:solidFill>
+          <a:schemeClr val="tx1"/>
+        </a:solidFill>
+        <a:latin typeface="+mn-lt"/>
+        <a:ea typeface="+mn-ea"/>
+        <a:cs typeface="+mn-cs"/>
+      </a:defRPr>
+    </a:lvl5pPr>
+    <a:lvl6pPr marL="2286000" algn="l" defTabSz="914400" rtl="0" eaLnBrk="1" latinLnBrk="0" hangingPunct="1">
+      <a:defRPr sz="1200" kern="1200">
+        <a:solidFill>
+          <a:schemeClr val="tx1"/>
+        </a:solidFill>
+        <a:latin typeface="+mn-lt"/>
+        <a:ea typeface="+mn-ea"/>
+        <a:cs typeface="+mn-cs"/>
+      </a:defRPr>
+    </a:lvl6pPr>
+    <a:lvl7pPr marL="2743200" algn="l" defTabSz="914400" rtl="0" eaLnBrk="1" latinLnBrk="0" hangingPunct="1">
+      <a:defRPr sz="1200" kern="1200">
+        <a:solidFill>
+          <a:schemeClr val="tx1"/>
+        </a:solidFill>
+        <a:latin typeface="+mn-lt"/>
+        <a:ea typeface="+mn-ea"/>
+        <a:cs typeface="+mn-cs"/>
+      </a:defRPr>
+    </a:lvl7pPr>
+    <a:lvl8pPr marL="3200400" algn="l" defTabSz="914400" rtl="0" eaLnBrk="1" latinLnBrk="0" hangingPunct="1">
+      <a:defRPr sz="1200" kern="1200">
+        <a:solidFill>
+          <a:schemeClr val="tx1"/>
+        </a:solidFill>
+        <a:latin typeface="+mn-lt"/>
+        <a:ea typeface="+mn-ea"/>
+        <a:cs typeface="+mn-cs"/>
+      </a:defRPr>
+    </a:lvl8pPr>
+    <a:lvl9pPr marL="3657600" algn="l" defTabSz="914400" rtl="0" eaLnBrk="1" latinLnBrk="0" hangingPunct="1">
+      <a:defRPr sz="1200" kern="1200">
+        <a:solidFill>
+          <a:schemeClr val="tx1"/>
+        </a:solidFill>
+        <a:latin typeface="+mn-lt"/>
+        <a:ea typeface="+mn-ea"/>
+        <a:cs typeface="+mn-cs"/>
+      </a:defRPr>
+    </a:lvl9pPr>
+  </p:notesStyle>
+</p:notesMaster>
+</file>
+
+<file path=ppt/notesSlides/notesSlide1.xml><?xml version="1.0" encoding="utf-8"?>
+<p:notes xmlns:a="http://schemas.openxmlformats.org/drawingml/2006/main" xmlns:r="http://schemas.openxmlformats.org/officeDocument/2006/relationships" xmlns:p="http://schemas.openxmlformats.org/presentationml/2006/main">
+  <p:cSld>
+    <p:spTree>
+      <p:nvGrpSpPr>
+        <p:cNvPr id="1" name=""/>
+        <p:cNvGrpSpPr/>
+        <p:nvPr/>
+      </p:nvGrpSpPr>
+      <p:grpSpPr>
+        <a:xfrm>
+          <a:off x="0" y="0"/>
+          <a:ext cx="0" cy="0"/>
+          <a:chOff x="0" y="0"/>
+          <a:chExt cx="0" cy="0"/>
+        </a:xfrm>
+      </p:grpSpPr>
+      <p:sp>
+        <p:nvSpPr>
+          <p:cNvPr id="2" name="Slide Image Placeholder 1"/>
+          <p:cNvSpPr>
+            <a:spLocks noGrp="1" noRot="1" noChangeAspect="1"/>
+          </p:cNvSpPr>
+          <p:nvPr>
+            <p:ph type="sldImg"/>
+          </p:nvPr>
+        </p:nvSpPr>
+        <p:spPr/>
+      </p:sp>
+      <p:sp>
+        <p:nvSpPr>
+          <p:cNvPr id="3" name="Notes Placeholder 2"/>
+          <p:cNvSpPr>
+            <a:spLocks noGrp="1"/>
+          </p:cNvSpPr>
+          <p:nvPr>
+            <p:ph type="body" idx="1"/>
+          </p:nvPr>
+        </p:nvSpPr>
+        <p:spPr/>
+        <p:txBody>
+          <a:bodyPr/>
+          <a:lstStyle/>
+          <a:p>
+            <a:r>
+              <a:rPr lang="en-US" dirty="0"/>
+              <a:t>As requested in the PRES1 assignment document, this presentation aims to answer:</a:t>
+            </a:r>
+          </a:p>
+          <a:p>
+            <a:endParaRPr lang="en-US" dirty="0"/>
+          </a:p>
+          <a:p>
+            <a:pPr marL="171450" indent="-171450">
+              <a:buFont typeface="Arial" panose="020B0604020202020204" pitchFamily="34" charset="0"/>
+              <a:buChar char="•"/>
+            </a:pPr>
+            <a:r>
+              <a:rPr lang="en-GB" sz="1200" dirty="0"/>
+              <a:t>What is your motivation behind the chosen analytic question relevant to the given dataset? </a:t>
+            </a:r>
+          </a:p>
+          <a:p>
+            <a:pPr marL="171450" indent="-171450">
+              <a:buFont typeface="Arial" panose="020B0604020202020204" pitchFamily="34" charset="0"/>
+              <a:buChar char="•"/>
+            </a:pPr>
+            <a:r>
+              <a:rPr lang="en-GB" sz="1200" dirty="0"/>
+              <a:t>Which articles, blogs, case studies, etc. did you refer to formulate your data analysis steps and understanding of the domain? You should provide a brief critical evaluation of those materials and methods. </a:t>
+            </a:r>
+          </a:p>
+          <a:p>
+            <a:pPr marL="171450" indent="-171450">
+              <a:buFont typeface="Arial" panose="020B0604020202020204" pitchFamily="34" charset="0"/>
+              <a:buChar char="•"/>
+            </a:pPr>
+            <a:r>
+              <a:rPr lang="en-GB" sz="1200" dirty="0"/>
+              <a:t>What were the challenges you encountered while pre-processing the data before the actual analysis and how did you overcome those challenges? </a:t>
+            </a:r>
+          </a:p>
+          <a:p>
+            <a:pPr marL="171450" indent="-171450">
+              <a:buFont typeface="Arial" panose="020B0604020202020204" pitchFamily="34" charset="0"/>
+              <a:buChar char="•"/>
+            </a:pPr>
+            <a:r>
+              <a:rPr lang="en-GB" sz="1200" dirty="0"/>
+              <a:t>What were the major steps taken by you for performing the data analysis in order to answer the chosen question? You should also show your key results. </a:t>
+            </a:r>
+          </a:p>
+          <a:p>
+            <a:pPr marL="171450" indent="-171450">
+              <a:buFont typeface="Arial" panose="020B0604020202020204" pitchFamily="34" charset="0"/>
+              <a:buChar char="•"/>
+            </a:pPr>
+            <a:r>
+              <a:rPr lang="en-GB" sz="1200" dirty="0"/>
+              <a:t>After working through the given dataset what do you think as the major limitations of this dataset?</a:t>
+            </a:r>
+            <a:endParaRPr lang="en-US" sz="1200" dirty="0"/>
+          </a:p>
+        </p:txBody>
+      </p:sp>
+      <p:sp>
+        <p:nvSpPr>
+          <p:cNvPr id="4" name="Slide Number Placeholder 3"/>
+          <p:cNvSpPr>
+            <a:spLocks noGrp="1"/>
+          </p:cNvSpPr>
+          <p:nvPr>
+            <p:ph type="sldNum" sz="quarter" idx="5"/>
+          </p:nvPr>
+        </p:nvSpPr>
+        <p:spPr/>
+        <p:txBody>
+          <a:bodyPr/>
+          <a:lstStyle/>
+          <a:p>
+            <a:fld id="{79A6C747-1210-A448-A00A-5DB36490E53F}" type="slidenum">
+              <a:rPr lang="en-US" smtClean="0"/>
+              <a:t>2</a:t>
+            </a:fld>
+            <a:endParaRPr lang="en-US"/>
+          </a:p>
+        </p:txBody>
+      </p:sp>
+    </p:spTree>
+    <p:extLst>
+      <p:ext uri="{BB962C8B-B14F-4D97-AF65-F5344CB8AC3E}">
+        <p14:creationId xmlns:p14="http://schemas.microsoft.com/office/powerpoint/2010/main" val="3554801669"/>
+      </p:ext>
+    </p:extLst>
+  </p:cSld>
+  <p:clrMapOvr>
+    <a:masterClrMapping/>
+  </p:clrMapOvr>
+</p:notes>
+</file>
+
+<file path=ppt/notesSlides/notesSlide2.xml><?xml version="1.0" encoding="utf-8"?>
+<p:notes xmlns:a="http://schemas.openxmlformats.org/drawingml/2006/main" xmlns:r="http://schemas.openxmlformats.org/officeDocument/2006/relationships" xmlns:p="http://schemas.openxmlformats.org/presentationml/2006/main">
+  <p:cSld>
+    <p:spTree>
+      <p:nvGrpSpPr>
+        <p:cNvPr id="1" name=""/>
+        <p:cNvGrpSpPr/>
+        <p:nvPr/>
+      </p:nvGrpSpPr>
+      <p:grpSpPr>
+        <a:xfrm>
+          <a:off x="0" y="0"/>
+          <a:ext cx="0" cy="0"/>
+          <a:chOff x="0" y="0"/>
+          <a:chExt cx="0" cy="0"/>
+        </a:xfrm>
+      </p:grpSpPr>
+      <p:sp>
+        <p:nvSpPr>
+          <p:cNvPr id="2" name="Slide Image Placeholder 1"/>
+          <p:cNvSpPr>
+            <a:spLocks noGrp="1" noRot="1" noChangeAspect="1"/>
+          </p:cNvSpPr>
+          <p:nvPr>
+            <p:ph type="sldImg"/>
+          </p:nvPr>
+        </p:nvSpPr>
+        <p:spPr/>
+      </p:sp>
+      <p:sp>
+        <p:nvSpPr>
+          <p:cNvPr id="3" name="Notes Placeholder 2"/>
+          <p:cNvSpPr>
+            <a:spLocks noGrp="1"/>
+          </p:cNvSpPr>
+          <p:nvPr>
+            <p:ph type="body" idx="1"/>
+          </p:nvPr>
+        </p:nvSpPr>
+        <p:spPr/>
+        <p:txBody>
+          <a:bodyPr/>
+          <a:lstStyle/>
+          <a:p>
+            <a:r>
+              <a:rPr lang="en-US" sz="1200" b="1" dirty="0">
+                <a:solidFill>
+                  <a:srgbClr val="FFFFFF"/>
+                </a:solidFill>
+              </a:rPr>
+              <a:t>What can we learn from this dataset?</a:t>
+            </a:r>
+          </a:p>
+          <a:p>
+            <a:endParaRPr lang="en-US" sz="1200" dirty="0">
+              <a:solidFill>
+                <a:srgbClr val="FFFFFF"/>
+              </a:solidFill>
+            </a:endParaRPr>
+          </a:p>
+          <a:p>
+            <a:r>
+              <a:rPr lang="en-US" sz="1200" dirty="0">
+                <a:solidFill>
+                  <a:srgbClr val="FFFFFF"/>
+                </a:solidFill>
+              </a:rPr>
+              <a:t>The dataset provides a year of data from a pollution sensor in an Italian city.</a:t>
+            </a:r>
+          </a:p>
+          <a:p>
+            <a:r>
+              <a:rPr lang="en-US" sz="1200" dirty="0">
+                <a:solidFill>
+                  <a:srgbClr val="FFFFFF"/>
+                </a:solidFill>
+              </a:rPr>
+              <a:t>The data were recorded in 2004 and 2005.</a:t>
+            </a:r>
+          </a:p>
+          <a:p>
+            <a:r>
+              <a:rPr lang="en-US" sz="1200" dirty="0">
+                <a:solidFill>
+                  <a:srgbClr val="FFFFFF"/>
+                </a:solidFill>
+              </a:rPr>
+              <a:t>There are a readings from a number of sensors, each tuned to a particular pollutant, along with localized atmospheric readings.</a:t>
+            </a:r>
+          </a:p>
+          <a:p>
+            <a:endParaRPr lang="en-US" sz="1200" dirty="0">
+              <a:solidFill>
+                <a:srgbClr val="FFFFFF"/>
+              </a:solidFill>
+            </a:endParaRPr>
+          </a:p>
+          <a:p>
+            <a:r>
+              <a:rPr lang="en-US" dirty="0"/>
+              <a:t>While the dataset is twenty years old, there are a number of relevant questions that can be posed that may have impact even today.</a:t>
+            </a:r>
+          </a:p>
+          <a:p>
+            <a:r>
+              <a:rPr lang="en-US" dirty="0"/>
+              <a:t>The questions that I chose to address were:</a:t>
+            </a:r>
+          </a:p>
+          <a:p>
+            <a:endParaRPr lang="en-US" dirty="0"/>
+          </a:p>
+          <a:p>
+            <a:pPr lvl="0"/>
+            <a:r>
+              <a:rPr lang="en-GB" dirty="0"/>
+              <a:t>Is it possible to </a:t>
+            </a:r>
+            <a:r>
+              <a:rPr lang="en-GB" b="1" dirty="0"/>
+              <a:t>predict future pollution levels</a:t>
+            </a:r>
+            <a:r>
+              <a:rPr lang="en-GB" dirty="0"/>
+              <a:t> based on historical data? </a:t>
+            </a:r>
+          </a:p>
+          <a:p>
+            <a:pPr lvl="0"/>
+            <a:endParaRPr lang="en-US" dirty="0"/>
+          </a:p>
+          <a:p>
+            <a:pPr lvl="0"/>
+            <a:r>
+              <a:rPr lang="en-GB" dirty="0"/>
+              <a:t>And can this data be used to </a:t>
+            </a:r>
+            <a:r>
+              <a:rPr lang="en-GB" b="1" dirty="0"/>
+              <a:t>inform residents</a:t>
+            </a:r>
+            <a:r>
+              <a:rPr lang="en-GB" dirty="0"/>
+              <a:t> of the city about potentially </a:t>
+            </a:r>
+            <a:r>
+              <a:rPr lang="en-GB" b="1" dirty="0"/>
+              <a:t>risky times</a:t>
+            </a:r>
+            <a:r>
+              <a:rPr lang="en-GB" dirty="0"/>
+              <a:t>, and </a:t>
+            </a:r>
+            <a:r>
+              <a:rPr lang="en-GB" b="1" dirty="0"/>
+              <a:t>when to take precautions </a:t>
+            </a:r>
+            <a:r>
+              <a:rPr lang="en-GB" dirty="0"/>
+              <a:t>or to avoid going outside without a mask?</a:t>
+            </a:r>
+            <a:endParaRPr lang="en-US" dirty="0"/>
+          </a:p>
+          <a:p>
+            <a:endParaRPr lang="en-US" dirty="0"/>
+          </a:p>
+        </p:txBody>
+      </p:sp>
+      <p:sp>
+        <p:nvSpPr>
+          <p:cNvPr id="4" name="Slide Number Placeholder 3"/>
+          <p:cNvSpPr>
+            <a:spLocks noGrp="1"/>
+          </p:cNvSpPr>
+          <p:nvPr>
+            <p:ph type="sldNum" sz="quarter" idx="5"/>
+          </p:nvPr>
+        </p:nvSpPr>
+        <p:spPr/>
+        <p:txBody>
+          <a:bodyPr/>
+          <a:lstStyle/>
+          <a:p>
+            <a:fld id="{79A6C747-1210-A448-A00A-5DB36490E53F}" type="slidenum">
+              <a:rPr lang="en-US" smtClean="0"/>
+              <a:t>3</a:t>
+            </a:fld>
+            <a:endParaRPr lang="en-US"/>
+          </a:p>
+        </p:txBody>
+      </p:sp>
+    </p:spTree>
+    <p:extLst>
+      <p:ext uri="{BB962C8B-B14F-4D97-AF65-F5344CB8AC3E}">
+        <p14:creationId xmlns:p14="http://schemas.microsoft.com/office/powerpoint/2010/main" val="2609608263"/>
+      </p:ext>
+    </p:extLst>
+  </p:cSld>
+  <p:clrMapOvr>
+    <a:masterClrMapping/>
+  </p:clrMapOvr>
+</p:notes>
+</file>
+
 <file path=ppt/slideLayouts/slideLayout1.xml><?xml version="1.0" encoding="utf-8"?>
 <p:sldLayout xmlns:a="http://schemas.openxmlformats.org/drawingml/2006/main" xmlns:r="http://schemas.openxmlformats.org/officeDocument/2006/relationships" xmlns:p="http://schemas.openxmlformats.org/presentationml/2006/main" type="title" preserve="1">
   <p:cSld name="Title Slide">
@@ -12870,7 +13567,7 @@
           <a:p>
             <a:fld id="{2A15B3F7-C000-024C-A0AB-B5B513CAF9A5}" type="datetimeFigureOut">
               <a:rPr lang="en-US" smtClean="0"/>
-              <a:t>5/30/25</a:t>
+              <a:t>6/2/25</a:t>
             </a:fld>
             <a:endParaRPr lang="en-US"/>
           </a:p>
@@ -13070,7 +13767,7 @@
           <a:p>
             <a:fld id="{2A15B3F7-C000-024C-A0AB-B5B513CAF9A5}" type="datetimeFigureOut">
               <a:rPr lang="en-US" smtClean="0"/>
-              <a:t>5/30/25</a:t>
+              <a:t>6/2/25</a:t>
             </a:fld>
             <a:endParaRPr lang="en-US"/>
           </a:p>
@@ -13280,7 +13977,7 @@
           <a:p>
             <a:fld id="{2A15B3F7-C000-024C-A0AB-B5B513CAF9A5}" type="datetimeFigureOut">
               <a:rPr lang="en-US" smtClean="0"/>
-              <a:t>5/30/25</a:t>
+              <a:t>6/2/25</a:t>
             </a:fld>
             <a:endParaRPr lang="en-US"/>
           </a:p>
@@ -13480,7 +14177,7 @@
           <a:p>
             <a:fld id="{2A15B3F7-C000-024C-A0AB-B5B513CAF9A5}" type="datetimeFigureOut">
               <a:rPr lang="en-US" smtClean="0"/>
-              <a:t>5/30/25</a:t>
+              <a:t>6/2/25</a:t>
             </a:fld>
             <a:endParaRPr lang="en-US"/>
           </a:p>
@@ -13756,7 +14453,7 @@
           <a:p>
             <a:fld id="{2A15B3F7-C000-024C-A0AB-B5B513CAF9A5}" type="datetimeFigureOut">
               <a:rPr lang="en-US" smtClean="0"/>
-              <a:t>5/30/25</a:t>
+              <a:t>6/2/25</a:t>
             </a:fld>
             <a:endParaRPr lang="en-US"/>
           </a:p>
@@ -14024,7 +14721,7 @@
           <a:p>
             <a:fld id="{2A15B3F7-C000-024C-A0AB-B5B513CAF9A5}" type="datetimeFigureOut">
               <a:rPr lang="en-US" smtClean="0"/>
-              <a:t>5/30/25</a:t>
+              <a:t>6/2/25</a:t>
             </a:fld>
             <a:endParaRPr lang="en-US"/>
           </a:p>
@@ -14439,7 +15136,7 @@
           <a:p>
             <a:fld id="{2A15B3F7-C000-024C-A0AB-B5B513CAF9A5}" type="datetimeFigureOut">
               <a:rPr lang="en-US" smtClean="0"/>
-              <a:t>5/30/25</a:t>
+              <a:t>6/2/25</a:t>
             </a:fld>
             <a:endParaRPr lang="en-US"/>
           </a:p>
@@ -14581,7 +15278,7 @@
           <a:p>
             <a:fld id="{2A15B3F7-C000-024C-A0AB-B5B513CAF9A5}" type="datetimeFigureOut">
               <a:rPr lang="en-US" smtClean="0"/>
-              <a:t>5/30/25</a:t>
+              <a:t>6/2/25</a:t>
             </a:fld>
             <a:endParaRPr lang="en-US"/>
           </a:p>
@@ -14694,7 +15391,7 @@
           <a:p>
             <a:fld id="{2A15B3F7-C000-024C-A0AB-B5B513CAF9A5}" type="datetimeFigureOut">
               <a:rPr lang="en-US" smtClean="0"/>
-              <a:t>5/30/25</a:t>
+              <a:t>6/2/25</a:t>
             </a:fld>
             <a:endParaRPr lang="en-US"/>
           </a:p>
@@ -15007,7 +15704,7 @@
           <a:p>
             <a:fld id="{2A15B3F7-C000-024C-A0AB-B5B513CAF9A5}" type="datetimeFigureOut">
               <a:rPr lang="en-US" smtClean="0"/>
-              <a:t>5/30/25</a:t>
+              <a:t>6/2/25</a:t>
             </a:fld>
             <a:endParaRPr lang="en-US"/>
           </a:p>
@@ -15296,7 +15993,7 @@
           <a:p>
             <a:fld id="{2A15B3F7-C000-024C-A0AB-B5B513CAF9A5}" type="datetimeFigureOut">
               <a:rPr lang="en-US" smtClean="0"/>
-              <a:t>5/30/25</a:t>
+              <a:t>6/2/25</a:t>
             </a:fld>
             <a:endParaRPr lang="en-US"/>
           </a:p>
@@ -15539,7 +16236,7 @@
           <a:p>
             <a:fld id="{2A15B3F7-C000-024C-A0AB-B5B513CAF9A5}" type="datetimeFigureOut">
               <a:rPr lang="en-US" smtClean="0"/>
-              <a:t>5/30/25</a:t>
+              <a:t>6/2/25</a:t>
             </a:fld>
             <a:endParaRPr lang="en-US"/>
           </a:p>
@@ -16457,589 +17154,6 @@
         <p:cNvPr id="1" name="">
           <a:extLst>
             <a:ext uri="{FF2B5EF4-FFF2-40B4-BE49-F238E27FC236}">
-              <a16:creationId xmlns:a16="http://schemas.microsoft.com/office/drawing/2014/main" id="{5E0359A2-FE98-FD1F-E7EB-1351B69E66E5}"/>
-            </a:ext>
-          </a:extLst>
-        </p:cNvPr>
-        <p:cNvGrpSpPr/>
-        <p:nvPr/>
-      </p:nvGrpSpPr>
-      <p:grpSpPr>
-        <a:xfrm>
-          <a:off x="0" y="0"/>
-          <a:ext cx="0" cy="0"/>
-          <a:chOff x="0" y="0"/>
-          <a:chExt cx="0" cy="0"/>
-        </a:xfrm>
-      </p:grpSpPr>
-      <p:sp useBgFill="1">
-        <p:nvSpPr>
-          <p:cNvPr id="8" name="Rectangle 7">
-            <a:extLst>
-              <a:ext uri="{FF2B5EF4-FFF2-40B4-BE49-F238E27FC236}">
-                <a16:creationId xmlns:a16="http://schemas.microsoft.com/office/drawing/2014/main" id="{EFB4DBF6-C34D-FB85-57E4-CC1C798CF3AF}"/>
-              </a:ext>
-              <a:ext uri="{C183D7F6-B498-43B3-948B-1728B52AA6E4}">
-                <adec:decorative xmlns:adec="http://schemas.microsoft.com/office/drawing/2017/decorative" val="1"/>
-              </a:ext>
-            </a:extLst>
-          </p:cNvPr>
-          <p:cNvSpPr>
-            <a:spLocks noGrp="1" noRot="1" noChangeAspect="1" noMove="1" noResize="1" noEditPoints="1" noAdjustHandles="1" noChangeArrowheads="1" noChangeShapeType="1" noTextEdit="1"/>
-          </p:cNvSpPr>
-          <p:nvPr>
-            <p:extLst>
-              <p:ext uri="{386F3935-93C4-4BCD-93E2-E3B085C9AB24}">
-                <p16:designElem xmlns:p16="http://schemas.microsoft.com/office/powerpoint/2015/main" val="1"/>
-              </p:ext>
-            </p:extLst>
-          </p:nvPr>
-        </p:nvSpPr>
-        <p:spPr>
-          <a:xfrm>
-            <a:off x="0" y="0"/>
-            <a:ext cx="12192000" cy="6858000"/>
-          </a:xfrm>
-          <a:prstGeom prst="rect">
-            <a:avLst/>
-          </a:prstGeom>
-          <a:ln w="12700" cap="flat" cmpd="sng" algn="ctr">
-            <a:noFill/>
-            <a:prstDash val="solid"/>
-            <a:miter lim="800000"/>
-          </a:ln>
-          <a:effectLst/>
-          <a:extLst>
-            <a:ext uri="{91240B29-F687-4F45-9708-019B960494DF}">
-              <a14:hiddenLine xmlns:a14="http://schemas.microsoft.com/office/drawing/2010/main" w="12700" cap="flat" cmpd="sng" algn="ctr">
-                <a:solidFill>
-                  <a:schemeClr val="accent1">
-                    <a:shade val="50000"/>
-                  </a:schemeClr>
-                </a:solidFill>
-                <a:prstDash val="solid"/>
-                <a:miter lim="800000"/>
-              </a14:hiddenLine>
-            </a:ext>
-          </a:extLst>
-        </p:spPr>
-        <p:style>
-          <a:lnRef idx="2">
-            <a:schemeClr val="accent1">
-              <a:shade val="50000"/>
-            </a:schemeClr>
-          </a:lnRef>
-          <a:fillRef idx="1">
-            <a:schemeClr val="accent1"/>
-          </a:fillRef>
-          <a:effectRef idx="0">
-            <a:schemeClr val="accent1"/>
-          </a:effectRef>
-          <a:fontRef idx="minor">
-            <a:schemeClr val="lt1"/>
-          </a:fontRef>
-        </p:style>
-        <p:txBody>
-          <a:bodyPr rtlCol="0" anchor="ctr"/>
-          <a:lstStyle/>
-          <a:p>
-            <a:pPr algn="ctr"/>
-            <a:endParaRPr lang="en-US"/>
-          </a:p>
-        </p:txBody>
-      </p:sp>
-      <p:sp>
-        <p:nvSpPr>
-          <p:cNvPr id="10" name="Rectangle 9">
-            <a:extLst>
-              <a:ext uri="{FF2B5EF4-FFF2-40B4-BE49-F238E27FC236}">
-                <a16:creationId xmlns:a16="http://schemas.microsoft.com/office/drawing/2014/main" id="{C18CE67A-E383-5582-B15B-740E60A260A4}"/>
-              </a:ext>
-              <a:ext uri="{C183D7F6-B498-43B3-948B-1728B52AA6E4}">
-                <adec:decorative xmlns:adec="http://schemas.microsoft.com/office/drawing/2017/decorative" val="1"/>
-              </a:ext>
-            </a:extLst>
-          </p:cNvPr>
-          <p:cNvSpPr>
-            <a:spLocks noGrp="1" noRot="1" noChangeAspect="1" noMove="1" noResize="1" noEditPoints="1" noAdjustHandles="1" noChangeArrowheads="1" noChangeShapeType="1" noTextEdit="1"/>
-          </p:cNvSpPr>
-          <p:nvPr>
-            <p:extLst>
-              <p:ext uri="{386F3935-93C4-4BCD-93E2-E3B085C9AB24}">
-                <p16:designElem xmlns:p16="http://schemas.microsoft.com/office/powerpoint/2015/main" val="1"/>
-              </p:ext>
-            </p:extLst>
-          </p:nvPr>
-        </p:nvSpPr>
-        <p:spPr>
-          <a:xfrm flipH="1">
-            <a:off x="-1" y="-1"/>
-            <a:ext cx="12191998" cy="1590742"/>
-          </a:xfrm>
-          <a:prstGeom prst="rect">
-            <a:avLst/>
-          </a:prstGeom>
-          <a:gradFill>
-            <a:gsLst>
-              <a:gs pos="0">
-                <a:srgbClr val="000000"/>
-              </a:gs>
-              <a:gs pos="100000">
-                <a:schemeClr val="accent1">
-                  <a:lumMod val="75000"/>
-                </a:schemeClr>
-              </a:gs>
-            </a:gsLst>
-            <a:lin ang="8400000" scaled="0"/>
-          </a:gradFill>
-          <a:ln>
-            <a:noFill/>
-          </a:ln>
-        </p:spPr>
-        <p:style>
-          <a:lnRef idx="2">
-            <a:schemeClr val="accent1">
-              <a:shade val="50000"/>
-            </a:schemeClr>
-          </a:lnRef>
-          <a:fillRef idx="1">
-            <a:schemeClr val="accent1"/>
-          </a:fillRef>
-          <a:effectRef idx="0">
-            <a:schemeClr val="accent1"/>
-          </a:effectRef>
-          <a:fontRef idx="minor">
-            <a:schemeClr val="lt1"/>
-          </a:fontRef>
-        </p:style>
-        <p:txBody>
-          <a:bodyPr rtlCol="0" anchor="ctr"/>
-          <a:lstStyle/>
-          <a:p>
-            <a:pPr algn="ctr"/>
-            <a:endParaRPr lang="en-US"/>
-          </a:p>
-        </p:txBody>
-      </p:sp>
-      <p:sp>
-        <p:nvSpPr>
-          <p:cNvPr id="12" name="Rectangle 11">
-            <a:extLst>
-              <a:ext uri="{FF2B5EF4-FFF2-40B4-BE49-F238E27FC236}">
-                <a16:creationId xmlns:a16="http://schemas.microsoft.com/office/drawing/2014/main" id="{0D370BC8-CF77-DF2B-6190-88C4D64CCC35}"/>
-              </a:ext>
-              <a:ext uri="{C183D7F6-B498-43B3-948B-1728B52AA6E4}">
-                <adec:decorative xmlns:adec="http://schemas.microsoft.com/office/drawing/2017/decorative" val="1"/>
-              </a:ext>
-            </a:extLst>
-          </p:cNvPr>
-          <p:cNvSpPr>
-            <a:spLocks noGrp="1" noRot="1" noChangeAspect="1" noMove="1" noResize="1" noEditPoints="1" noAdjustHandles="1" noChangeArrowheads="1" noChangeShapeType="1" noTextEdit="1"/>
-          </p:cNvSpPr>
-          <p:nvPr>
-            <p:extLst>
-              <p:ext uri="{386F3935-93C4-4BCD-93E2-E3B085C9AB24}">
-                <p16:designElem xmlns:p16="http://schemas.microsoft.com/office/powerpoint/2015/main" val="1"/>
-              </p:ext>
-            </p:extLst>
-          </p:nvPr>
-        </p:nvSpPr>
-        <p:spPr>
-          <a:xfrm rot="10800000" flipH="1">
-            <a:off x="-3" y="0"/>
-            <a:ext cx="8115306" cy="1590742"/>
-          </a:xfrm>
-          <a:prstGeom prst="rect">
-            <a:avLst/>
-          </a:prstGeom>
-          <a:gradFill>
-            <a:gsLst>
-              <a:gs pos="20000">
-                <a:schemeClr val="accent1">
-                  <a:alpha val="0"/>
-                </a:schemeClr>
-              </a:gs>
-              <a:gs pos="100000">
-                <a:schemeClr val="accent1">
-                  <a:lumMod val="50000"/>
-                  <a:alpha val="55000"/>
-                </a:schemeClr>
-              </a:gs>
-            </a:gsLst>
-            <a:lin ang="13800000" scaled="0"/>
-          </a:gradFill>
-          <a:ln>
-            <a:noFill/>
-          </a:ln>
-        </p:spPr>
-        <p:style>
-          <a:lnRef idx="2">
-            <a:schemeClr val="accent1">
-              <a:shade val="50000"/>
-            </a:schemeClr>
-          </a:lnRef>
-          <a:fillRef idx="1">
-            <a:schemeClr val="accent1"/>
-          </a:fillRef>
-          <a:effectRef idx="0">
-            <a:schemeClr val="accent1"/>
-          </a:effectRef>
-          <a:fontRef idx="minor">
-            <a:schemeClr val="lt1"/>
-          </a:fontRef>
-        </p:style>
-        <p:txBody>
-          <a:bodyPr rtlCol="0" anchor="ctr"/>
-          <a:lstStyle/>
-          <a:p>
-            <a:pPr algn="ctr"/>
-            <a:endParaRPr lang="en-US"/>
-          </a:p>
-        </p:txBody>
-      </p:sp>
-      <p:sp>
-        <p:nvSpPr>
-          <p:cNvPr id="14" name="Rectangle 13">
-            <a:extLst>
-              <a:ext uri="{FF2B5EF4-FFF2-40B4-BE49-F238E27FC236}">
-                <a16:creationId xmlns:a16="http://schemas.microsoft.com/office/drawing/2014/main" id="{B5C1ADD9-BCBF-58CB-5080-A4FF0EF32A8D}"/>
-              </a:ext>
-              <a:ext uri="{C183D7F6-B498-43B3-948B-1728B52AA6E4}">
-                <adec:decorative xmlns:adec="http://schemas.microsoft.com/office/drawing/2017/decorative" val="1"/>
-              </a:ext>
-            </a:extLst>
-          </p:cNvPr>
-          <p:cNvSpPr>
-            <a:spLocks noGrp="1" noRot="1" noChangeAspect="1" noMove="1" noResize="1" noEditPoints="1" noAdjustHandles="1" noChangeArrowheads="1" noChangeShapeType="1" noTextEdit="1"/>
-          </p:cNvSpPr>
-          <p:nvPr>
-            <p:extLst>
-              <p:ext uri="{386F3935-93C4-4BCD-93E2-E3B085C9AB24}">
-                <p16:designElem xmlns:p16="http://schemas.microsoft.com/office/powerpoint/2015/main" val="1"/>
-              </p:ext>
-            </p:extLst>
-          </p:nvPr>
-        </p:nvSpPr>
-        <p:spPr>
-          <a:xfrm flipH="1">
-            <a:off x="8115299" y="-1"/>
-            <a:ext cx="4076698" cy="1590742"/>
-          </a:xfrm>
-          <a:prstGeom prst="rect">
-            <a:avLst/>
-          </a:prstGeom>
-          <a:gradFill>
-            <a:gsLst>
-              <a:gs pos="0">
-                <a:schemeClr val="accent1">
-                  <a:alpha val="66000"/>
-                </a:schemeClr>
-              </a:gs>
-              <a:gs pos="100000">
-                <a:srgbClr val="000000">
-                  <a:alpha val="30000"/>
-                </a:srgbClr>
-              </a:gs>
-            </a:gsLst>
-            <a:lin ang="13200000" scaled="0"/>
-          </a:gradFill>
-          <a:ln>
-            <a:noFill/>
-          </a:ln>
-        </p:spPr>
-        <p:style>
-          <a:lnRef idx="2">
-            <a:schemeClr val="accent1">
-              <a:shade val="50000"/>
-            </a:schemeClr>
-          </a:lnRef>
-          <a:fillRef idx="1">
-            <a:schemeClr val="accent1"/>
-          </a:fillRef>
-          <a:effectRef idx="0">
-            <a:schemeClr val="accent1"/>
-          </a:effectRef>
-          <a:fontRef idx="minor">
-            <a:schemeClr val="lt1"/>
-          </a:fontRef>
-        </p:style>
-        <p:txBody>
-          <a:bodyPr rtlCol="0" anchor="ctr"/>
-          <a:lstStyle/>
-          <a:p>
-            <a:pPr algn="ctr"/>
-            <a:endParaRPr lang="en-US"/>
-          </a:p>
-        </p:txBody>
-      </p:sp>
-      <p:sp>
-        <p:nvSpPr>
-          <p:cNvPr id="16" name="Rectangle 15">
-            <a:extLst>
-              <a:ext uri="{FF2B5EF4-FFF2-40B4-BE49-F238E27FC236}">
-                <a16:creationId xmlns:a16="http://schemas.microsoft.com/office/drawing/2014/main" id="{F5D45A15-7B60-B8E7-653F-F64B5612FF1E}"/>
-              </a:ext>
-              <a:ext uri="{C183D7F6-B498-43B3-948B-1728B52AA6E4}">
-                <adec:decorative xmlns:adec="http://schemas.microsoft.com/office/drawing/2017/decorative" val="1"/>
-              </a:ext>
-            </a:extLst>
-          </p:cNvPr>
-          <p:cNvSpPr>
-            <a:spLocks noGrp="1" noRot="1" noChangeAspect="1" noMove="1" noResize="1" noEditPoints="1" noAdjustHandles="1" noChangeArrowheads="1" noChangeShapeType="1" noTextEdit="1"/>
-          </p:cNvSpPr>
-          <p:nvPr>
-            <p:extLst>
-              <p:ext uri="{386F3935-93C4-4BCD-93E2-E3B085C9AB24}">
-                <p16:designElem xmlns:p16="http://schemas.microsoft.com/office/powerpoint/2015/main" val="1"/>
-              </p:ext>
-            </p:extLst>
-          </p:nvPr>
-        </p:nvSpPr>
-        <p:spPr>
-          <a:xfrm>
-            <a:off x="459350" y="-1"/>
-            <a:ext cx="11732646" cy="1597433"/>
-          </a:xfrm>
-          <a:prstGeom prst="rect">
-            <a:avLst/>
-          </a:prstGeom>
-          <a:gradFill>
-            <a:gsLst>
-              <a:gs pos="50000">
-                <a:srgbClr val="000000">
-                  <a:alpha val="0"/>
-                </a:srgbClr>
-              </a:gs>
-              <a:gs pos="99000">
-                <a:schemeClr val="accent1">
-                  <a:lumMod val="50000"/>
-                  <a:alpha val="52000"/>
-                </a:schemeClr>
-              </a:gs>
-            </a:gsLst>
-            <a:lin ang="16800000" scaled="0"/>
-          </a:gradFill>
-          <a:ln>
-            <a:noFill/>
-          </a:ln>
-        </p:spPr>
-        <p:style>
-          <a:lnRef idx="2">
-            <a:schemeClr val="accent1">
-              <a:shade val="50000"/>
-            </a:schemeClr>
-          </a:lnRef>
-          <a:fillRef idx="1">
-            <a:schemeClr val="accent1"/>
-          </a:fillRef>
-          <a:effectRef idx="0">
-            <a:schemeClr val="accent1"/>
-          </a:effectRef>
-          <a:fontRef idx="minor">
-            <a:schemeClr val="lt1"/>
-          </a:fontRef>
-        </p:style>
-        <p:txBody>
-          <a:bodyPr rtlCol="0" anchor="ctr"/>
-          <a:lstStyle/>
-          <a:p>
-            <a:pPr algn="ctr"/>
-            <a:endParaRPr lang="en-US"/>
-          </a:p>
-        </p:txBody>
-      </p:sp>
-      <p:sp>
-        <p:nvSpPr>
-          <p:cNvPr id="2" name="Title 1">
-            <a:extLst>
-              <a:ext uri="{FF2B5EF4-FFF2-40B4-BE49-F238E27FC236}">
-                <a16:creationId xmlns:a16="http://schemas.microsoft.com/office/drawing/2014/main" id="{96AE9CE1-5330-35FF-C74F-A36E200EDA23}"/>
-              </a:ext>
-            </a:extLst>
-          </p:cNvPr>
-          <p:cNvSpPr>
-            <a:spLocks noGrp="1"/>
-          </p:cNvSpPr>
-          <p:nvPr>
-            <p:ph type="title"/>
-          </p:nvPr>
-        </p:nvSpPr>
-        <p:spPr>
-          <a:xfrm>
-            <a:off x="1371599" y="294538"/>
-            <a:ext cx="9895951" cy="1033669"/>
-          </a:xfrm>
-        </p:spPr>
-        <p:txBody>
-          <a:bodyPr>
-            <a:normAutofit/>
-          </a:bodyPr>
-          <a:lstStyle/>
-          <a:p>
-            <a:r>
-              <a:rPr lang="en-US" sz="4000" dirty="0">
-                <a:solidFill>
-                  <a:srgbClr val="FFFFFF"/>
-                </a:solidFill>
-              </a:rPr>
-              <a:t>Analysis: Patterns in the Data</a:t>
-            </a:r>
-          </a:p>
-        </p:txBody>
-      </p:sp>
-      <p:sp>
-        <p:nvSpPr>
-          <p:cNvPr id="3" name="Content Placeholder 2">
-            <a:extLst>
-              <a:ext uri="{FF2B5EF4-FFF2-40B4-BE49-F238E27FC236}">
-                <a16:creationId xmlns:a16="http://schemas.microsoft.com/office/drawing/2014/main" id="{AFB51B9D-1072-EE37-E024-C516CB3640E0}"/>
-              </a:ext>
-            </a:extLst>
-          </p:cNvPr>
-          <p:cNvSpPr>
-            <a:spLocks noGrp="1"/>
-          </p:cNvSpPr>
-          <p:nvPr>
-            <p:ph idx="1"/>
-          </p:nvPr>
-        </p:nvSpPr>
-        <p:spPr>
-          <a:xfrm>
-            <a:off x="342577" y="2210764"/>
-            <a:ext cx="9299134" cy="1723015"/>
-          </a:xfrm>
-        </p:spPr>
-        <p:txBody>
-          <a:bodyPr anchor="ctr">
-            <a:normAutofit/>
-          </a:bodyPr>
-          <a:lstStyle/>
-          <a:p>
-            <a:pPr marL="0" indent="0">
-              <a:buNone/>
-            </a:pPr>
-            <a:r>
-              <a:rPr lang="en-US" sz="3600" dirty="0"/>
-              <a:t>Heatmaps of any one pollutant, e.g. NOx (GT)</a:t>
-            </a:r>
-          </a:p>
-          <a:p>
-            <a:r>
-              <a:rPr lang="en-US" sz="2400" dirty="0"/>
-              <a:t>More pollution in ‘rush hours’</a:t>
-            </a:r>
-          </a:p>
-          <a:p>
-            <a:r>
-              <a:rPr lang="en-US" sz="2400" dirty="0"/>
-              <a:t>More pollution in cold months</a:t>
-            </a:r>
-            <a:r>
-              <a:rPr lang="en-US" sz="2400" dirty="0">
-                <a:highlight>
-                  <a:srgbClr val="FFFF00"/>
-                </a:highlight>
-              </a:rPr>
-              <a:t>.  (((REDRAW CHARTS???)))</a:t>
-            </a:r>
-          </a:p>
-          <a:p>
-            <a:endParaRPr lang="en-US" sz="3600" dirty="0"/>
-          </a:p>
-          <a:p>
-            <a:endParaRPr lang="en-US" sz="3600" dirty="0"/>
-          </a:p>
-        </p:txBody>
-      </p:sp>
-      <p:pic>
-        <p:nvPicPr>
-          <p:cNvPr id="5" name="Picture 4" descr="A chart of a number of colored squares&#10;&#10;AI-generated content may be incorrect.">
-            <a:extLst>
-              <a:ext uri="{FF2B5EF4-FFF2-40B4-BE49-F238E27FC236}">
-                <a16:creationId xmlns:a16="http://schemas.microsoft.com/office/drawing/2014/main" id="{0DE1D700-19A2-DFA1-6734-C4D1543E5762}"/>
-              </a:ext>
-            </a:extLst>
-          </p:cNvPr>
-          <p:cNvPicPr>
-            <a:picLocks noChangeAspect="1"/>
-          </p:cNvPicPr>
-          <p:nvPr/>
-        </p:nvPicPr>
-        <p:blipFill>
-          <a:blip r:embed="rId2"/>
-          <a:stretch>
-            <a:fillRect/>
-          </a:stretch>
-        </p:blipFill>
-        <p:spPr>
-          <a:xfrm>
-            <a:off x="1574315" y="3429000"/>
-            <a:ext cx="4437811" cy="3273795"/>
-          </a:xfrm>
-          <a:prstGeom prst="rect">
-            <a:avLst/>
-          </a:prstGeom>
-        </p:spPr>
-      </p:pic>
-      <p:pic>
-        <p:nvPicPr>
-          <p:cNvPr id="7" name="Picture 6" descr="A chart of a number of squares&#10;&#10;AI-generated content may be incorrect.">
-            <a:extLst>
-              <a:ext uri="{FF2B5EF4-FFF2-40B4-BE49-F238E27FC236}">
-                <a16:creationId xmlns:a16="http://schemas.microsoft.com/office/drawing/2014/main" id="{707B4F84-6697-FD42-5C91-DE96B5EBC0FD}"/>
-              </a:ext>
-            </a:extLst>
-          </p:cNvPr>
-          <p:cNvPicPr>
-            <a:picLocks noChangeAspect="1"/>
-          </p:cNvPicPr>
-          <p:nvPr/>
-        </p:nvPicPr>
-        <p:blipFill>
-          <a:blip r:embed="rId3"/>
-          <a:stretch>
-            <a:fillRect/>
-          </a:stretch>
-        </p:blipFill>
-        <p:spPr>
-          <a:xfrm>
-            <a:off x="6012126" y="3429000"/>
-            <a:ext cx="4579726" cy="3293114"/>
-          </a:xfrm>
-          <a:prstGeom prst="rect">
-            <a:avLst/>
-          </a:prstGeom>
-        </p:spPr>
-      </p:pic>
-    </p:spTree>
-    <p:extLst>
-      <p:ext uri="{BB962C8B-B14F-4D97-AF65-F5344CB8AC3E}">
-        <p14:creationId xmlns:p14="http://schemas.microsoft.com/office/powerpoint/2010/main" val="3580835498"/>
-      </p:ext>
-    </p:extLst>
-  </p:cSld>
-  <p:clrMapOvr>
-    <a:masterClrMapping/>
-  </p:clrMapOvr>
-</p:sld>
-</file>
-
-<file path=ppt/slides/slide11.xml><?xml version="1.0" encoding="utf-8"?>
-<p:sld xmlns:a="http://schemas.openxmlformats.org/drawingml/2006/main" xmlns:r="http://schemas.openxmlformats.org/officeDocument/2006/relationships" xmlns:p="http://schemas.openxmlformats.org/presentationml/2006/main">
-  <p:cSld>
-    <p:bg>
-      <p:bgPr>
-        <a:solidFill>
-          <a:schemeClr val="bg1"/>
-        </a:solidFill>
-        <a:effectLst/>
-      </p:bgPr>
-    </p:bg>
-    <p:spTree>
-      <p:nvGrpSpPr>
-        <p:cNvPr id="1" name="">
-          <a:extLst>
-            <a:ext uri="{FF2B5EF4-FFF2-40B4-BE49-F238E27FC236}">
               <a16:creationId xmlns:a16="http://schemas.microsoft.com/office/drawing/2014/main" id="{2391F2B4-AC6D-6B3D-4635-4A8B9C57CC2F}"/>
             </a:ext>
           </a:extLst>
@@ -17518,7 +17632,7 @@
 </p:sld>
 </file>
 
-<file path=ppt/slides/slide12.xml><?xml version="1.0" encoding="utf-8"?>
+<file path=ppt/slides/slide11.xml><?xml version="1.0" encoding="utf-8"?>
 <p:sld xmlns:a="http://schemas.openxmlformats.org/drawingml/2006/main" xmlns:r="http://schemas.openxmlformats.org/officeDocument/2006/relationships" xmlns:p="http://schemas.openxmlformats.org/presentationml/2006/main">
   <p:cSld>
     <p:bg>
@@ -18021,516 +18135,6 @@
     </p:bg>
     <p:spTree>
       <p:nvGrpSpPr>
-        <p:cNvPr id="1" name=""/>
-        <p:cNvGrpSpPr/>
-        <p:nvPr/>
-      </p:nvGrpSpPr>
-      <p:grpSpPr>
-        <a:xfrm>
-          <a:off x="0" y="0"/>
-          <a:ext cx="0" cy="0"/>
-          <a:chOff x="0" y="0"/>
-          <a:chExt cx="0" cy="0"/>
-        </a:xfrm>
-      </p:grpSpPr>
-      <p:sp useBgFill="1">
-        <p:nvSpPr>
-          <p:cNvPr id="8" name="Rectangle 7">
-            <a:extLst>
-              <a:ext uri="{FF2B5EF4-FFF2-40B4-BE49-F238E27FC236}">
-                <a16:creationId xmlns:a16="http://schemas.microsoft.com/office/drawing/2014/main" id="{1B15ED52-F352-441B-82BF-E0EA34836D08}"/>
-              </a:ext>
-              <a:ext uri="{C183D7F6-B498-43B3-948B-1728B52AA6E4}">
-                <adec:decorative xmlns:adec="http://schemas.microsoft.com/office/drawing/2017/decorative" val="1"/>
-              </a:ext>
-            </a:extLst>
-          </p:cNvPr>
-          <p:cNvSpPr>
-            <a:spLocks noGrp="1" noRot="1" noChangeAspect="1" noMove="1" noResize="1" noEditPoints="1" noAdjustHandles="1" noChangeArrowheads="1" noChangeShapeType="1" noTextEdit="1"/>
-          </p:cNvSpPr>
-          <p:nvPr>
-            <p:extLst>
-              <p:ext uri="{386F3935-93C4-4BCD-93E2-E3B085C9AB24}">
-                <p16:designElem xmlns:p16="http://schemas.microsoft.com/office/powerpoint/2015/main" val="1"/>
-              </p:ext>
-            </p:extLst>
-          </p:nvPr>
-        </p:nvSpPr>
-        <p:spPr>
-          <a:xfrm>
-            <a:off x="0" y="0"/>
-            <a:ext cx="12192000" cy="6858000"/>
-          </a:xfrm>
-          <a:prstGeom prst="rect">
-            <a:avLst/>
-          </a:prstGeom>
-          <a:ln w="12700" cap="flat" cmpd="sng" algn="ctr">
-            <a:noFill/>
-            <a:prstDash val="solid"/>
-            <a:miter lim="800000"/>
-          </a:ln>
-          <a:effectLst/>
-          <a:extLst>
-            <a:ext uri="{91240B29-F687-4F45-9708-019B960494DF}">
-              <a14:hiddenLine xmlns:a14="http://schemas.microsoft.com/office/drawing/2010/main" w="12700" cap="flat" cmpd="sng" algn="ctr">
-                <a:solidFill>
-                  <a:schemeClr val="accent1">
-                    <a:shade val="50000"/>
-                  </a:schemeClr>
-                </a:solidFill>
-                <a:prstDash val="solid"/>
-                <a:miter lim="800000"/>
-              </a14:hiddenLine>
-            </a:ext>
-          </a:extLst>
-        </p:spPr>
-        <p:style>
-          <a:lnRef idx="2">
-            <a:schemeClr val="accent1">
-              <a:shade val="50000"/>
-            </a:schemeClr>
-          </a:lnRef>
-          <a:fillRef idx="1">
-            <a:schemeClr val="accent1"/>
-          </a:fillRef>
-          <a:effectRef idx="0">
-            <a:schemeClr val="accent1"/>
-          </a:effectRef>
-          <a:fontRef idx="minor">
-            <a:schemeClr val="lt1"/>
-          </a:fontRef>
-        </p:style>
-        <p:txBody>
-          <a:bodyPr rtlCol="0" anchor="ctr"/>
-          <a:lstStyle/>
-          <a:p>
-            <a:pPr algn="ctr"/>
-            <a:endParaRPr lang="en-US"/>
-          </a:p>
-        </p:txBody>
-      </p:sp>
-      <p:sp>
-        <p:nvSpPr>
-          <p:cNvPr id="10" name="Rectangle 9">
-            <a:extLst>
-              <a:ext uri="{FF2B5EF4-FFF2-40B4-BE49-F238E27FC236}">
-                <a16:creationId xmlns:a16="http://schemas.microsoft.com/office/drawing/2014/main" id="{3B2E3793-BFE6-45A2-9B7B-E18844431C99}"/>
-              </a:ext>
-              <a:ext uri="{C183D7F6-B498-43B3-948B-1728B52AA6E4}">
-                <adec:decorative xmlns:adec="http://schemas.microsoft.com/office/drawing/2017/decorative" val="1"/>
-              </a:ext>
-            </a:extLst>
-          </p:cNvPr>
-          <p:cNvSpPr>
-            <a:spLocks noGrp="1" noRot="1" noChangeAspect="1" noMove="1" noResize="1" noEditPoints="1" noAdjustHandles="1" noChangeArrowheads="1" noChangeShapeType="1" noTextEdit="1"/>
-          </p:cNvSpPr>
-          <p:nvPr>
-            <p:extLst>
-              <p:ext uri="{386F3935-93C4-4BCD-93E2-E3B085C9AB24}">
-                <p16:designElem xmlns:p16="http://schemas.microsoft.com/office/powerpoint/2015/main" val="1"/>
-              </p:ext>
-            </p:extLst>
-          </p:nvPr>
-        </p:nvSpPr>
-        <p:spPr>
-          <a:xfrm flipH="1">
-            <a:off x="-1" y="-1"/>
-            <a:ext cx="12191998" cy="1590742"/>
-          </a:xfrm>
-          <a:prstGeom prst="rect">
-            <a:avLst/>
-          </a:prstGeom>
-          <a:gradFill>
-            <a:gsLst>
-              <a:gs pos="0">
-                <a:srgbClr val="000000"/>
-              </a:gs>
-              <a:gs pos="100000">
-                <a:schemeClr val="accent1">
-                  <a:lumMod val="75000"/>
-                </a:schemeClr>
-              </a:gs>
-            </a:gsLst>
-            <a:lin ang="8400000" scaled="0"/>
-          </a:gradFill>
-          <a:ln>
-            <a:noFill/>
-          </a:ln>
-        </p:spPr>
-        <p:style>
-          <a:lnRef idx="2">
-            <a:schemeClr val="accent1">
-              <a:shade val="50000"/>
-            </a:schemeClr>
-          </a:lnRef>
-          <a:fillRef idx="1">
-            <a:schemeClr val="accent1"/>
-          </a:fillRef>
-          <a:effectRef idx="0">
-            <a:schemeClr val="accent1"/>
-          </a:effectRef>
-          <a:fontRef idx="minor">
-            <a:schemeClr val="lt1"/>
-          </a:fontRef>
-        </p:style>
-        <p:txBody>
-          <a:bodyPr rtlCol="0" anchor="ctr"/>
-          <a:lstStyle/>
-          <a:p>
-            <a:pPr algn="ctr"/>
-            <a:endParaRPr lang="en-US"/>
-          </a:p>
-        </p:txBody>
-      </p:sp>
-      <p:sp>
-        <p:nvSpPr>
-          <p:cNvPr id="12" name="Rectangle 11">
-            <a:extLst>
-              <a:ext uri="{FF2B5EF4-FFF2-40B4-BE49-F238E27FC236}">
-                <a16:creationId xmlns:a16="http://schemas.microsoft.com/office/drawing/2014/main" id="{BC4C4868-CB8F-4AF9-9CDB-8108F2C19B67}"/>
-              </a:ext>
-              <a:ext uri="{C183D7F6-B498-43B3-948B-1728B52AA6E4}">
-                <adec:decorative xmlns:adec="http://schemas.microsoft.com/office/drawing/2017/decorative" val="1"/>
-              </a:ext>
-            </a:extLst>
-          </p:cNvPr>
-          <p:cNvSpPr>
-            <a:spLocks noGrp="1" noRot="1" noChangeAspect="1" noMove="1" noResize="1" noEditPoints="1" noAdjustHandles="1" noChangeArrowheads="1" noChangeShapeType="1" noTextEdit="1"/>
-          </p:cNvSpPr>
-          <p:nvPr>
-            <p:extLst>
-              <p:ext uri="{386F3935-93C4-4BCD-93E2-E3B085C9AB24}">
-                <p16:designElem xmlns:p16="http://schemas.microsoft.com/office/powerpoint/2015/main" val="1"/>
-              </p:ext>
-            </p:extLst>
-          </p:nvPr>
-        </p:nvSpPr>
-        <p:spPr>
-          <a:xfrm rot="10800000" flipH="1">
-            <a:off x="-3" y="0"/>
-            <a:ext cx="8115306" cy="1590742"/>
-          </a:xfrm>
-          <a:prstGeom prst="rect">
-            <a:avLst/>
-          </a:prstGeom>
-          <a:gradFill>
-            <a:gsLst>
-              <a:gs pos="20000">
-                <a:schemeClr val="accent1">
-                  <a:alpha val="0"/>
-                </a:schemeClr>
-              </a:gs>
-              <a:gs pos="100000">
-                <a:schemeClr val="accent1">
-                  <a:lumMod val="50000"/>
-                  <a:alpha val="55000"/>
-                </a:schemeClr>
-              </a:gs>
-            </a:gsLst>
-            <a:lin ang="13800000" scaled="0"/>
-          </a:gradFill>
-          <a:ln>
-            <a:noFill/>
-          </a:ln>
-        </p:spPr>
-        <p:style>
-          <a:lnRef idx="2">
-            <a:schemeClr val="accent1">
-              <a:shade val="50000"/>
-            </a:schemeClr>
-          </a:lnRef>
-          <a:fillRef idx="1">
-            <a:schemeClr val="accent1"/>
-          </a:fillRef>
-          <a:effectRef idx="0">
-            <a:schemeClr val="accent1"/>
-          </a:effectRef>
-          <a:fontRef idx="minor">
-            <a:schemeClr val="lt1"/>
-          </a:fontRef>
-        </p:style>
-        <p:txBody>
-          <a:bodyPr rtlCol="0" anchor="ctr"/>
-          <a:lstStyle/>
-          <a:p>
-            <a:pPr algn="ctr"/>
-            <a:endParaRPr lang="en-US"/>
-          </a:p>
-        </p:txBody>
-      </p:sp>
-      <p:sp>
-        <p:nvSpPr>
-          <p:cNvPr id="14" name="Rectangle 13">
-            <a:extLst>
-              <a:ext uri="{FF2B5EF4-FFF2-40B4-BE49-F238E27FC236}">
-                <a16:creationId xmlns:a16="http://schemas.microsoft.com/office/drawing/2014/main" id="{375E0459-6403-40CD-989D-56A4407CA12E}"/>
-              </a:ext>
-              <a:ext uri="{C183D7F6-B498-43B3-948B-1728B52AA6E4}">
-                <adec:decorative xmlns:adec="http://schemas.microsoft.com/office/drawing/2017/decorative" val="1"/>
-              </a:ext>
-            </a:extLst>
-          </p:cNvPr>
-          <p:cNvSpPr>
-            <a:spLocks noGrp="1" noRot="1" noChangeAspect="1" noMove="1" noResize="1" noEditPoints="1" noAdjustHandles="1" noChangeArrowheads="1" noChangeShapeType="1" noTextEdit="1"/>
-          </p:cNvSpPr>
-          <p:nvPr>
-            <p:extLst>
-              <p:ext uri="{386F3935-93C4-4BCD-93E2-E3B085C9AB24}">
-                <p16:designElem xmlns:p16="http://schemas.microsoft.com/office/powerpoint/2015/main" val="1"/>
-              </p:ext>
-            </p:extLst>
-          </p:nvPr>
-        </p:nvSpPr>
-        <p:spPr>
-          <a:xfrm flipH="1">
-            <a:off x="8115299" y="-1"/>
-            <a:ext cx="4076698" cy="1590742"/>
-          </a:xfrm>
-          <a:prstGeom prst="rect">
-            <a:avLst/>
-          </a:prstGeom>
-          <a:gradFill>
-            <a:gsLst>
-              <a:gs pos="0">
-                <a:schemeClr val="accent1">
-                  <a:alpha val="66000"/>
-                </a:schemeClr>
-              </a:gs>
-              <a:gs pos="100000">
-                <a:srgbClr val="000000">
-                  <a:alpha val="30000"/>
-                </a:srgbClr>
-              </a:gs>
-            </a:gsLst>
-            <a:lin ang="13200000" scaled="0"/>
-          </a:gradFill>
-          <a:ln>
-            <a:noFill/>
-          </a:ln>
-        </p:spPr>
-        <p:style>
-          <a:lnRef idx="2">
-            <a:schemeClr val="accent1">
-              <a:shade val="50000"/>
-            </a:schemeClr>
-          </a:lnRef>
-          <a:fillRef idx="1">
-            <a:schemeClr val="accent1"/>
-          </a:fillRef>
-          <a:effectRef idx="0">
-            <a:schemeClr val="accent1"/>
-          </a:effectRef>
-          <a:fontRef idx="minor">
-            <a:schemeClr val="lt1"/>
-          </a:fontRef>
-        </p:style>
-        <p:txBody>
-          <a:bodyPr rtlCol="0" anchor="ctr"/>
-          <a:lstStyle/>
-          <a:p>
-            <a:pPr algn="ctr"/>
-            <a:endParaRPr lang="en-US"/>
-          </a:p>
-        </p:txBody>
-      </p:sp>
-      <p:sp>
-        <p:nvSpPr>
-          <p:cNvPr id="16" name="Rectangle 15">
-            <a:extLst>
-              <a:ext uri="{FF2B5EF4-FFF2-40B4-BE49-F238E27FC236}">
-                <a16:creationId xmlns:a16="http://schemas.microsoft.com/office/drawing/2014/main" id="{53E5B1A8-3AC9-4BD1-9BBC-78CA94F2D1BA}"/>
-              </a:ext>
-              <a:ext uri="{C183D7F6-B498-43B3-948B-1728B52AA6E4}">
-                <adec:decorative xmlns:adec="http://schemas.microsoft.com/office/drawing/2017/decorative" val="1"/>
-              </a:ext>
-            </a:extLst>
-          </p:cNvPr>
-          <p:cNvSpPr>
-            <a:spLocks noGrp="1" noRot="1" noChangeAspect="1" noMove="1" noResize="1" noEditPoints="1" noAdjustHandles="1" noChangeArrowheads="1" noChangeShapeType="1" noTextEdit="1"/>
-          </p:cNvSpPr>
-          <p:nvPr>
-            <p:extLst>
-              <p:ext uri="{386F3935-93C4-4BCD-93E2-E3B085C9AB24}">
-                <p16:designElem xmlns:p16="http://schemas.microsoft.com/office/powerpoint/2015/main" val="1"/>
-              </p:ext>
-            </p:extLst>
-          </p:nvPr>
-        </p:nvSpPr>
-        <p:spPr>
-          <a:xfrm>
-            <a:off x="459350" y="-1"/>
-            <a:ext cx="11732646" cy="1597433"/>
-          </a:xfrm>
-          <a:prstGeom prst="rect">
-            <a:avLst/>
-          </a:prstGeom>
-          <a:gradFill>
-            <a:gsLst>
-              <a:gs pos="50000">
-                <a:srgbClr val="000000">
-                  <a:alpha val="0"/>
-                </a:srgbClr>
-              </a:gs>
-              <a:gs pos="99000">
-                <a:schemeClr val="accent1">
-                  <a:lumMod val="50000"/>
-                  <a:alpha val="52000"/>
-                </a:schemeClr>
-              </a:gs>
-            </a:gsLst>
-            <a:lin ang="16800000" scaled="0"/>
-          </a:gradFill>
-          <a:ln>
-            <a:noFill/>
-          </a:ln>
-        </p:spPr>
-        <p:style>
-          <a:lnRef idx="2">
-            <a:schemeClr val="accent1">
-              <a:shade val="50000"/>
-            </a:schemeClr>
-          </a:lnRef>
-          <a:fillRef idx="1">
-            <a:schemeClr val="accent1"/>
-          </a:fillRef>
-          <a:effectRef idx="0">
-            <a:schemeClr val="accent1"/>
-          </a:effectRef>
-          <a:fontRef idx="minor">
-            <a:schemeClr val="lt1"/>
-          </a:fontRef>
-        </p:style>
-        <p:txBody>
-          <a:bodyPr rtlCol="0" anchor="ctr"/>
-          <a:lstStyle/>
-          <a:p>
-            <a:pPr algn="ctr"/>
-            <a:endParaRPr lang="en-US"/>
-          </a:p>
-        </p:txBody>
-      </p:sp>
-      <p:sp>
-        <p:nvSpPr>
-          <p:cNvPr id="2" name="Title 1">
-            <a:extLst>
-              <a:ext uri="{FF2B5EF4-FFF2-40B4-BE49-F238E27FC236}">
-                <a16:creationId xmlns:a16="http://schemas.microsoft.com/office/drawing/2014/main" id="{2B8AD16F-EA36-138F-C3B3-7DBC69FA7101}"/>
-              </a:ext>
-            </a:extLst>
-          </p:cNvPr>
-          <p:cNvSpPr>
-            <a:spLocks noGrp="1"/>
-          </p:cNvSpPr>
-          <p:nvPr>
-            <p:ph type="title"/>
-          </p:nvPr>
-        </p:nvSpPr>
-        <p:spPr>
-          <a:xfrm>
-            <a:off x="1371599" y="294538"/>
-            <a:ext cx="9895951" cy="1033669"/>
-          </a:xfrm>
-        </p:spPr>
-        <p:txBody>
-          <a:bodyPr>
-            <a:normAutofit/>
-          </a:bodyPr>
-          <a:lstStyle/>
-          <a:p>
-            <a:endParaRPr lang="en-US" sz="4000">
-              <a:solidFill>
-                <a:srgbClr val="FFFFFF"/>
-              </a:solidFill>
-            </a:endParaRPr>
-          </a:p>
-        </p:txBody>
-      </p:sp>
-      <p:sp>
-        <p:nvSpPr>
-          <p:cNvPr id="3" name="Content Placeholder 2">
-            <a:extLst>
-              <a:ext uri="{FF2B5EF4-FFF2-40B4-BE49-F238E27FC236}">
-                <a16:creationId xmlns:a16="http://schemas.microsoft.com/office/drawing/2014/main" id="{8E33AD3E-A41E-1B62-32A3-42D2BD5848CC}"/>
-              </a:ext>
-            </a:extLst>
-          </p:cNvPr>
-          <p:cNvSpPr>
-            <a:spLocks noGrp="1"/>
-          </p:cNvSpPr>
-          <p:nvPr>
-            <p:ph idx="1"/>
-          </p:nvPr>
-        </p:nvSpPr>
-        <p:spPr>
-          <a:xfrm>
-            <a:off x="1371599" y="2318197"/>
-            <a:ext cx="9724031" cy="3683358"/>
-          </a:xfrm>
-        </p:spPr>
-        <p:txBody>
-          <a:bodyPr anchor="ctr">
-            <a:normAutofit/>
-          </a:bodyPr>
-          <a:lstStyle/>
-          <a:p>
-            <a:r>
-              <a:rPr lang="en-GB" sz="2000" dirty="0"/>
-              <a:t>What is your motivation behind the chosen analytic question relevant to the given dataset? </a:t>
-            </a:r>
-          </a:p>
-          <a:p>
-            <a:r>
-              <a:rPr lang="en-GB" sz="2000" dirty="0"/>
-              <a:t>• Which articles, blogs, case studies, etc. did you refer to formulate your data analysis steps and understanding of the domain? You should provide a brief critical evaluation of those materials and methods. </a:t>
-            </a:r>
-          </a:p>
-          <a:p>
-            <a:r>
-              <a:rPr lang="en-GB" sz="2000" dirty="0"/>
-              <a:t>• What were the challenges you encountered while pre-processing the data before the actual analysis and how did you overcome those challenges? </a:t>
-            </a:r>
-          </a:p>
-          <a:p>
-            <a:r>
-              <a:rPr lang="en-GB" sz="2000" dirty="0"/>
-              <a:t>• What were the major steps taken by you for performing the data analysis in order to answer the chosen question? You should also show your key results. </a:t>
-            </a:r>
-          </a:p>
-          <a:p>
-            <a:r>
-              <a:rPr lang="en-GB" sz="2000" dirty="0"/>
-              <a:t>• After working through the given dataset what do you think as the major limitations of this dataset?</a:t>
-            </a:r>
-            <a:endParaRPr lang="en-US" sz="2000" dirty="0"/>
-          </a:p>
-        </p:txBody>
-      </p:sp>
-    </p:spTree>
-    <p:extLst>
-      <p:ext uri="{BB962C8B-B14F-4D97-AF65-F5344CB8AC3E}">
-        <p14:creationId xmlns:p14="http://schemas.microsoft.com/office/powerpoint/2010/main" val="1588400107"/>
-      </p:ext>
-    </p:extLst>
-  </p:cSld>
-  <p:clrMapOvr>
-    <a:masterClrMapping/>
-  </p:clrMapOvr>
-</p:sld>
-</file>
-
-<file path=ppt/slides/slide3.xml><?xml version="1.0" encoding="utf-8"?>
-<p:sld xmlns:a="http://schemas.openxmlformats.org/drawingml/2006/main" xmlns:r="http://schemas.openxmlformats.org/officeDocument/2006/relationships" xmlns:p="http://schemas.openxmlformats.org/presentationml/2006/main">
-  <p:cSld>
-    <p:bg>
-      <p:bgPr>
-        <a:solidFill>
-          <a:schemeClr val="bg1"/>
-        </a:solidFill>
-        <a:effectLst/>
-      </p:bgPr>
-    </p:bg>
-    <p:spTree>
-      <p:nvGrpSpPr>
         <p:cNvPr id="1" name="">
           <a:extLst>
             <a:ext uri="{FF2B5EF4-FFF2-40B4-BE49-F238E27FC236}">
@@ -18918,7 +18522,7 @@
         </p:xfrm>
         <a:graphic>
           <a:graphicData uri="http://schemas.openxmlformats.org/drawingml/2006/diagram">
-            <dgm:relIds xmlns:dgm="http://schemas.openxmlformats.org/drawingml/2006/diagram" xmlns:r="http://schemas.openxmlformats.org/officeDocument/2006/relationships" r:dm="rId2" r:lo="rId3" r:qs="rId4" r:cs="rId5"/>
+            <dgm:relIds xmlns:dgm="http://schemas.openxmlformats.org/drawingml/2006/diagram" xmlns:r="http://schemas.openxmlformats.org/officeDocument/2006/relationships" r:dm="rId3" r:lo="rId4" r:qs="rId5" r:cs="rId6"/>
           </a:graphicData>
         </a:graphic>
       </p:graphicFrame>
@@ -18935,7 +18539,7 @@
 </p:sld>
 </file>
 
-<file path=ppt/slides/slide4.xml><?xml version="1.0" encoding="utf-8"?>
+<file path=ppt/slides/slide3.xml><?xml version="1.0" encoding="utf-8"?>
 <p:sld xmlns:a="http://schemas.openxmlformats.org/drawingml/2006/main" xmlns:r="http://schemas.openxmlformats.org/officeDocument/2006/relationships" xmlns:p="http://schemas.openxmlformats.org/presentationml/2006/main">
   <p:cSld>
     <p:bg>
@@ -19323,7 +18927,7 @@
             <p:ph idx="1"/>
             <p:extLst>
               <p:ext uri="{D42A27DB-BD31-4B8C-83A1-F6EECF244321}">
-                <p14:modId xmlns:p14="http://schemas.microsoft.com/office/powerpoint/2010/main" val="225666521"/>
+                <p14:modId xmlns:p14="http://schemas.microsoft.com/office/powerpoint/2010/main" val="355570392"/>
               </p:ext>
             </p:extLst>
           </p:nvPr>
@@ -19334,7 +18938,7 @@
         </p:xfrm>
         <a:graphic>
           <a:graphicData uri="http://schemas.openxmlformats.org/drawingml/2006/diagram">
-            <dgm:relIds xmlns:dgm="http://schemas.openxmlformats.org/drawingml/2006/diagram" xmlns:r="http://schemas.openxmlformats.org/officeDocument/2006/relationships" r:dm="rId2" r:lo="rId3" r:qs="rId4" r:cs="rId5"/>
+            <dgm:relIds xmlns:dgm="http://schemas.openxmlformats.org/drawingml/2006/diagram" xmlns:r="http://schemas.openxmlformats.org/officeDocument/2006/relationships" r:dm="rId3" r:lo="rId4" r:qs="rId5" r:cs="rId6"/>
           </a:graphicData>
         </a:graphic>
       </p:graphicFrame>
@@ -19351,7 +18955,7 @@
 </p:sld>
 </file>
 
-<file path=ppt/slides/slide5.xml><?xml version="1.0" encoding="utf-8"?>
+<file path=ppt/slides/slide4.xml><?xml version="1.0" encoding="utf-8"?>
 <p:sld xmlns:a="http://schemas.openxmlformats.org/drawingml/2006/main" xmlns:r="http://schemas.openxmlformats.org/officeDocument/2006/relationships" xmlns:p="http://schemas.openxmlformats.org/presentationml/2006/main">
   <p:cSld>
     <p:bg>
@@ -19767,7 +19371,7 @@
 </p:sld>
 </file>
 
-<file path=ppt/slides/slide6.xml><?xml version="1.0" encoding="utf-8"?>
+<file path=ppt/slides/slide5.xml><?xml version="1.0" encoding="utf-8"?>
 <p:sld xmlns:a="http://schemas.openxmlformats.org/drawingml/2006/main" xmlns:r="http://schemas.openxmlformats.org/officeDocument/2006/relationships" xmlns:p="http://schemas.openxmlformats.org/presentationml/2006/main">
   <p:cSld>
     <p:bg>
@@ -20270,7 +19874,7 @@
 </p:sld>
 </file>
 
-<file path=ppt/slides/slide7.xml><?xml version="1.0" encoding="utf-8"?>
+<file path=ppt/slides/slide6.xml><?xml version="1.0" encoding="utf-8"?>
 <p:sld xmlns:a="http://schemas.openxmlformats.org/drawingml/2006/main" xmlns:r="http://schemas.openxmlformats.org/officeDocument/2006/relationships" xmlns:p="http://schemas.openxmlformats.org/presentationml/2006/main">
   <p:cSld>
     <p:bg>
@@ -21471,7 +21075,7 @@
 </p:sld>
 </file>
 
-<file path=ppt/slides/slide8.xml><?xml version="1.0" encoding="utf-8"?>
+<file path=ppt/slides/slide7.xml><?xml version="1.0" encoding="utf-8"?>
 <p:sld xmlns:a="http://schemas.openxmlformats.org/drawingml/2006/main" xmlns:r="http://schemas.openxmlformats.org/officeDocument/2006/relationships" xmlns:p="http://schemas.openxmlformats.org/presentationml/2006/main">
   <p:cSld>
     <p:bg>
@@ -22007,7 +21611,7 @@
 </p:sld>
 </file>
 
-<file path=ppt/slides/slide9.xml><?xml version="1.0" encoding="utf-8"?>
+<file path=ppt/slides/slide8.xml><?xml version="1.0" encoding="utf-8"?>
 <p:sld xmlns:a="http://schemas.openxmlformats.org/drawingml/2006/main" xmlns:r="http://schemas.openxmlformats.org/officeDocument/2006/relationships" xmlns:p="http://schemas.openxmlformats.org/presentationml/2006/main">
   <p:cSld>
     <p:bg>
@@ -22498,6 +22102,589 @@
     <p:extLst>
       <p:ext uri="{BB962C8B-B14F-4D97-AF65-F5344CB8AC3E}">
         <p14:creationId xmlns:p14="http://schemas.microsoft.com/office/powerpoint/2010/main" val="3035585550"/>
+      </p:ext>
+    </p:extLst>
+  </p:cSld>
+  <p:clrMapOvr>
+    <a:masterClrMapping/>
+  </p:clrMapOvr>
+</p:sld>
+</file>
+
+<file path=ppt/slides/slide9.xml><?xml version="1.0" encoding="utf-8"?>
+<p:sld xmlns:a="http://schemas.openxmlformats.org/drawingml/2006/main" xmlns:r="http://schemas.openxmlformats.org/officeDocument/2006/relationships" xmlns:p="http://schemas.openxmlformats.org/presentationml/2006/main">
+  <p:cSld>
+    <p:bg>
+      <p:bgPr>
+        <a:solidFill>
+          <a:schemeClr val="bg1"/>
+        </a:solidFill>
+        <a:effectLst/>
+      </p:bgPr>
+    </p:bg>
+    <p:spTree>
+      <p:nvGrpSpPr>
+        <p:cNvPr id="1" name="">
+          <a:extLst>
+            <a:ext uri="{FF2B5EF4-FFF2-40B4-BE49-F238E27FC236}">
+              <a16:creationId xmlns:a16="http://schemas.microsoft.com/office/drawing/2014/main" id="{5E0359A2-FE98-FD1F-E7EB-1351B69E66E5}"/>
+            </a:ext>
+          </a:extLst>
+        </p:cNvPr>
+        <p:cNvGrpSpPr/>
+        <p:nvPr/>
+      </p:nvGrpSpPr>
+      <p:grpSpPr>
+        <a:xfrm>
+          <a:off x="0" y="0"/>
+          <a:ext cx="0" cy="0"/>
+          <a:chOff x="0" y="0"/>
+          <a:chExt cx="0" cy="0"/>
+        </a:xfrm>
+      </p:grpSpPr>
+      <p:sp useBgFill="1">
+        <p:nvSpPr>
+          <p:cNvPr id="8" name="Rectangle 7">
+            <a:extLst>
+              <a:ext uri="{FF2B5EF4-FFF2-40B4-BE49-F238E27FC236}">
+                <a16:creationId xmlns:a16="http://schemas.microsoft.com/office/drawing/2014/main" id="{EFB4DBF6-C34D-FB85-57E4-CC1C798CF3AF}"/>
+              </a:ext>
+              <a:ext uri="{C183D7F6-B498-43B3-948B-1728B52AA6E4}">
+                <adec:decorative xmlns:adec="http://schemas.microsoft.com/office/drawing/2017/decorative" val="1"/>
+              </a:ext>
+            </a:extLst>
+          </p:cNvPr>
+          <p:cNvSpPr>
+            <a:spLocks noGrp="1" noRot="1" noChangeAspect="1" noMove="1" noResize="1" noEditPoints="1" noAdjustHandles="1" noChangeArrowheads="1" noChangeShapeType="1" noTextEdit="1"/>
+          </p:cNvSpPr>
+          <p:nvPr>
+            <p:extLst>
+              <p:ext uri="{386F3935-93C4-4BCD-93E2-E3B085C9AB24}">
+                <p16:designElem xmlns:p16="http://schemas.microsoft.com/office/powerpoint/2015/main" val="1"/>
+              </p:ext>
+            </p:extLst>
+          </p:nvPr>
+        </p:nvSpPr>
+        <p:spPr>
+          <a:xfrm>
+            <a:off x="0" y="0"/>
+            <a:ext cx="12192000" cy="6858000"/>
+          </a:xfrm>
+          <a:prstGeom prst="rect">
+            <a:avLst/>
+          </a:prstGeom>
+          <a:ln w="12700" cap="flat" cmpd="sng" algn="ctr">
+            <a:noFill/>
+            <a:prstDash val="solid"/>
+            <a:miter lim="800000"/>
+          </a:ln>
+          <a:effectLst/>
+          <a:extLst>
+            <a:ext uri="{91240B29-F687-4F45-9708-019B960494DF}">
+              <a14:hiddenLine xmlns:a14="http://schemas.microsoft.com/office/drawing/2010/main" w="12700" cap="flat" cmpd="sng" algn="ctr">
+                <a:solidFill>
+                  <a:schemeClr val="accent1">
+                    <a:shade val="50000"/>
+                  </a:schemeClr>
+                </a:solidFill>
+                <a:prstDash val="solid"/>
+                <a:miter lim="800000"/>
+              </a14:hiddenLine>
+            </a:ext>
+          </a:extLst>
+        </p:spPr>
+        <p:style>
+          <a:lnRef idx="2">
+            <a:schemeClr val="accent1">
+              <a:shade val="50000"/>
+            </a:schemeClr>
+          </a:lnRef>
+          <a:fillRef idx="1">
+            <a:schemeClr val="accent1"/>
+          </a:fillRef>
+          <a:effectRef idx="0">
+            <a:schemeClr val="accent1"/>
+          </a:effectRef>
+          <a:fontRef idx="minor">
+            <a:schemeClr val="lt1"/>
+          </a:fontRef>
+        </p:style>
+        <p:txBody>
+          <a:bodyPr rtlCol="0" anchor="ctr"/>
+          <a:lstStyle/>
+          <a:p>
+            <a:pPr algn="ctr"/>
+            <a:endParaRPr lang="en-US"/>
+          </a:p>
+        </p:txBody>
+      </p:sp>
+      <p:sp>
+        <p:nvSpPr>
+          <p:cNvPr id="10" name="Rectangle 9">
+            <a:extLst>
+              <a:ext uri="{FF2B5EF4-FFF2-40B4-BE49-F238E27FC236}">
+                <a16:creationId xmlns:a16="http://schemas.microsoft.com/office/drawing/2014/main" id="{C18CE67A-E383-5582-B15B-740E60A260A4}"/>
+              </a:ext>
+              <a:ext uri="{C183D7F6-B498-43B3-948B-1728B52AA6E4}">
+                <adec:decorative xmlns:adec="http://schemas.microsoft.com/office/drawing/2017/decorative" val="1"/>
+              </a:ext>
+            </a:extLst>
+          </p:cNvPr>
+          <p:cNvSpPr>
+            <a:spLocks noGrp="1" noRot="1" noChangeAspect="1" noMove="1" noResize="1" noEditPoints="1" noAdjustHandles="1" noChangeArrowheads="1" noChangeShapeType="1" noTextEdit="1"/>
+          </p:cNvSpPr>
+          <p:nvPr>
+            <p:extLst>
+              <p:ext uri="{386F3935-93C4-4BCD-93E2-E3B085C9AB24}">
+                <p16:designElem xmlns:p16="http://schemas.microsoft.com/office/powerpoint/2015/main" val="1"/>
+              </p:ext>
+            </p:extLst>
+          </p:nvPr>
+        </p:nvSpPr>
+        <p:spPr>
+          <a:xfrm flipH="1">
+            <a:off x="-1" y="-1"/>
+            <a:ext cx="12191998" cy="1590742"/>
+          </a:xfrm>
+          <a:prstGeom prst="rect">
+            <a:avLst/>
+          </a:prstGeom>
+          <a:gradFill>
+            <a:gsLst>
+              <a:gs pos="0">
+                <a:srgbClr val="000000"/>
+              </a:gs>
+              <a:gs pos="100000">
+                <a:schemeClr val="accent1">
+                  <a:lumMod val="75000"/>
+                </a:schemeClr>
+              </a:gs>
+            </a:gsLst>
+            <a:lin ang="8400000" scaled="0"/>
+          </a:gradFill>
+          <a:ln>
+            <a:noFill/>
+          </a:ln>
+        </p:spPr>
+        <p:style>
+          <a:lnRef idx="2">
+            <a:schemeClr val="accent1">
+              <a:shade val="50000"/>
+            </a:schemeClr>
+          </a:lnRef>
+          <a:fillRef idx="1">
+            <a:schemeClr val="accent1"/>
+          </a:fillRef>
+          <a:effectRef idx="0">
+            <a:schemeClr val="accent1"/>
+          </a:effectRef>
+          <a:fontRef idx="minor">
+            <a:schemeClr val="lt1"/>
+          </a:fontRef>
+        </p:style>
+        <p:txBody>
+          <a:bodyPr rtlCol="0" anchor="ctr"/>
+          <a:lstStyle/>
+          <a:p>
+            <a:pPr algn="ctr"/>
+            <a:endParaRPr lang="en-US"/>
+          </a:p>
+        </p:txBody>
+      </p:sp>
+      <p:sp>
+        <p:nvSpPr>
+          <p:cNvPr id="12" name="Rectangle 11">
+            <a:extLst>
+              <a:ext uri="{FF2B5EF4-FFF2-40B4-BE49-F238E27FC236}">
+                <a16:creationId xmlns:a16="http://schemas.microsoft.com/office/drawing/2014/main" id="{0D370BC8-CF77-DF2B-6190-88C4D64CCC35}"/>
+              </a:ext>
+              <a:ext uri="{C183D7F6-B498-43B3-948B-1728B52AA6E4}">
+                <adec:decorative xmlns:adec="http://schemas.microsoft.com/office/drawing/2017/decorative" val="1"/>
+              </a:ext>
+            </a:extLst>
+          </p:cNvPr>
+          <p:cNvSpPr>
+            <a:spLocks noGrp="1" noRot="1" noChangeAspect="1" noMove="1" noResize="1" noEditPoints="1" noAdjustHandles="1" noChangeArrowheads="1" noChangeShapeType="1" noTextEdit="1"/>
+          </p:cNvSpPr>
+          <p:nvPr>
+            <p:extLst>
+              <p:ext uri="{386F3935-93C4-4BCD-93E2-E3B085C9AB24}">
+                <p16:designElem xmlns:p16="http://schemas.microsoft.com/office/powerpoint/2015/main" val="1"/>
+              </p:ext>
+            </p:extLst>
+          </p:nvPr>
+        </p:nvSpPr>
+        <p:spPr>
+          <a:xfrm rot="10800000" flipH="1">
+            <a:off x="-3" y="0"/>
+            <a:ext cx="8115306" cy="1590742"/>
+          </a:xfrm>
+          <a:prstGeom prst="rect">
+            <a:avLst/>
+          </a:prstGeom>
+          <a:gradFill>
+            <a:gsLst>
+              <a:gs pos="20000">
+                <a:schemeClr val="accent1">
+                  <a:alpha val="0"/>
+                </a:schemeClr>
+              </a:gs>
+              <a:gs pos="100000">
+                <a:schemeClr val="accent1">
+                  <a:lumMod val="50000"/>
+                  <a:alpha val="55000"/>
+                </a:schemeClr>
+              </a:gs>
+            </a:gsLst>
+            <a:lin ang="13800000" scaled="0"/>
+          </a:gradFill>
+          <a:ln>
+            <a:noFill/>
+          </a:ln>
+        </p:spPr>
+        <p:style>
+          <a:lnRef idx="2">
+            <a:schemeClr val="accent1">
+              <a:shade val="50000"/>
+            </a:schemeClr>
+          </a:lnRef>
+          <a:fillRef idx="1">
+            <a:schemeClr val="accent1"/>
+          </a:fillRef>
+          <a:effectRef idx="0">
+            <a:schemeClr val="accent1"/>
+          </a:effectRef>
+          <a:fontRef idx="minor">
+            <a:schemeClr val="lt1"/>
+          </a:fontRef>
+        </p:style>
+        <p:txBody>
+          <a:bodyPr rtlCol="0" anchor="ctr"/>
+          <a:lstStyle/>
+          <a:p>
+            <a:pPr algn="ctr"/>
+            <a:endParaRPr lang="en-US"/>
+          </a:p>
+        </p:txBody>
+      </p:sp>
+      <p:sp>
+        <p:nvSpPr>
+          <p:cNvPr id="14" name="Rectangle 13">
+            <a:extLst>
+              <a:ext uri="{FF2B5EF4-FFF2-40B4-BE49-F238E27FC236}">
+                <a16:creationId xmlns:a16="http://schemas.microsoft.com/office/drawing/2014/main" id="{B5C1ADD9-BCBF-58CB-5080-A4FF0EF32A8D}"/>
+              </a:ext>
+              <a:ext uri="{C183D7F6-B498-43B3-948B-1728B52AA6E4}">
+                <adec:decorative xmlns:adec="http://schemas.microsoft.com/office/drawing/2017/decorative" val="1"/>
+              </a:ext>
+            </a:extLst>
+          </p:cNvPr>
+          <p:cNvSpPr>
+            <a:spLocks noGrp="1" noRot="1" noChangeAspect="1" noMove="1" noResize="1" noEditPoints="1" noAdjustHandles="1" noChangeArrowheads="1" noChangeShapeType="1" noTextEdit="1"/>
+          </p:cNvSpPr>
+          <p:nvPr>
+            <p:extLst>
+              <p:ext uri="{386F3935-93C4-4BCD-93E2-E3B085C9AB24}">
+                <p16:designElem xmlns:p16="http://schemas.microsoft.com/office/powerpoint/2015/main" val="1"/>
+              </p:ext>
+            </p:extLst>
+          </p:nvPr>
+        </p:nvSpPr>
+        <p:spPr>
+          <a:xfrm flipH="1">
+            <a:off x="8115299" y="-1"/>
+            <a:ext cx="4076698" cy="1590742"/>
+          </a:xfrm>
+          <a:prstGeom prst="rect">
+            <a:avLst/>
+          </a:prstGeom>
+          <a:gradFill>
+            <a:gsLst>
+              <a:gs pos="0">
+                <a:schemeClr val="accent1">
+                  <a:alpha val="66000"/>
+                </a:schemeClr>
+              </a:gs>
+              <a:gs pos="100000">
+                <a:srgbClr val="000000">
+                  <a:alpha val="30000"/>
+                </a:srgbClr>
+              </a:gs>
+            </a:gsLst>
+            <a:lin ang="13200000" scaled="0"/>
+          </a:gradFill>
+          <a:ln>
+            <a:noFill/>
+          </a:ln>
+        </p:spPr>
+        <p:style>
+          <a:lnRef idx="2">
+            <a:schemeClr val="accent1">
+              <a:shade val="50000"/>
+            </a:schemeClr>
+          </a:lnRef>
+          <a:fillRef idx="1">
+            <a:schemeClr val="accent1"/>
+          </a:fillRef>
+          <a:effectRef idx="0">
+            <a:schemeClr val="accent1"/>
+          </a:effectRef>
+          <a:fontRef idx="minor">
+            <a:schemeClr val="lt1"/>
+          </a:fontRef>
+        </p:style>
+        <p:txBody>
+          <a:bodyPr rtlCol="0" anchor="ctr"/>
+          <a:lstStyle/>
+          <a:p>
+            <a:pPr algn="ctr"/>
+            <a:endParaRPr lang="en-US"/>
+          </a:p>
+        </p:txBody>
+      </p:sp>
+      <p:sp>
+        <p:nvSpPr>
+          <p:cNvPr id="16" name="Rectangle 15">
+            <a:extLst>
+              <a:ext uri="{FF2B5EF4-FFF2-40B4-BE49-F238E27FC236}">
+                <a16:creationId xmlns:a16="http://schemas.microsoft.com/office/drawing/2014/main" id="{F5D45A15-7B60-B8E7-653F-F64B5612FF1E}"/>
+              </a:ext>
+              <a:ext uri="{C183D7F6-B498-43B3-948B-1728B52AA6E4}">
+                <adec:decorative xmlns:adec="http://schemas.microsoft.com/office/drawing/2017/decorative" val="1"/>
+              </a:ext>
+            </a:extLst>
+          </p:cNvPr>
+          <p:cNvSpPr>
+            <a:spLocks noGrp="1" noRot="1" noChangeAspect="1" noMove="1" noResize="1" noEditPoints="1" noAdjustHandles="1" noChangeArrowheads="1" noChangeShapeType="1" noTextEdit="1"/>
+          </p:cNvSpPr>
+          <p:nvPr>
+            <p:extLst>
+              <p:ext uri="{386F3935-93C4-4BCD-93E2-E3B085C9AB24}">
+                <p16:designElem xmlns:p16="http://schemas.microsoft.com/office/powerpoint/2015/main" val="1"/>
+              </p:ext>
+            </p:extLst>
+          </p:nvPr>
+        </p:nvSpPr>
+        <p:spPr>
+          <a:xfrm>
+            <a:off x="459350" y="-1"/>
+            <a:ext cx="11732646" cy="1597433"/>
+          </a:xfrm>
+          <a:prstGeom prst="rect">
+            <a:avLst/>
+          </a:prstGeom>
+          <a:gradFill>
+            <a:gsLst>
+              <a:gs pos="50000">
+                <a:srgbClr val="000000">
+                  <a:alpha val="0"/>
+                </a:srgbClr>
+              </a:gs>
+              <a:gs pos="99000">
+                <a:schemeClr val="accent1">
+                  <a:lumMod val="50000"/>
+                  <a:alpha val="52000"/>
+                </a:schemeClr>
+              </a:gs>
+            </a:gsLst>
+            <a:lin ang="16800000" scaled="0"/>
+          </a:gradFill>
+          <a:ln>
+            <a:noFill/>
+          </a:ln>
+        </p:spPr>
+        <p:style>
+          <a:lnRef idx="2">
+            <a:schemeClr val="accent1">
+              <a:shade val="50000"/>
+            </a:schemeClr>
+          </a:lnRef>
+          <a:fillRef idx="1">
+            <a:schemeClr val="accent1"/>
+          </a:fillRef>
+          <a:effectRef idx="0">
+            <a:schemeClr val="accent1"/>
+          </a:effectRef>
+          <a:fontRef idx="minor">
+            <a:schemeClr val="lt1"/>
+          </a:fontRef>
+        </p:style>
+        <p:txBody>
+          <a:bodyPr rtlCol="0" anchor="ctr"/>
+          <a:lstStyle/>
+          <a:p>
+            <a:pPr algn="ctr"/>
+            <a:endParaRPr lang="en-US"/>
+          </a:p>
+        </p:txBody>
+      </p:sp>
+      <p:sp>
+        <p:nvSpPr>
+          <p:cNvPr id="2" name="Title 1">
+            <a:extLst>
+              <a:ext uri="{FF2B5EF4-FFF2-40B4-BE49-F238E27FC236}">
+                <a16:creationId xmlns:a16="http://schemas.microsoft.com/office/drawing/2014/main" id="{96AE9CE1-5330-35FF-C74F-A36E200EDA23}"/>
+              </a:ext>
+            </a:extLst>
+          </p:cNvPr>
+          <p:cNvSpPr>
+            <a:spLocks noGrp="1"/>
+          </p:cNvSpPr>
+          <p:nvPr>
+            <p:ph type="title"/>
+          </p:nvPr>
+        </p:nvSpPr>
+        <p:spPr>
+          <a:xfrm>
+            <a:off x="1371599" y="294538"/>
+            <a:ext cx="9895951" cy="1033669"/>
+          </a:xfrm>
+        </p:spPr>
+        <p:txBody>
+          <a:bodyPr>
+            <a:normAutofit/>
+          </a:bodyPr>
+          <a:lstStyle/>
+          <a:p>
+            <a:r>
+              <a:rPr lang="en-US" sz="4000" dirty="0">
+                <a:solidFill>
+                  <a:srgbClr val="FFFFFF"/>
+                </a:solidFill>
+              </a:rPr>
+              <a:t>Analysis: Patterns in the Data</a:t>
+            </a:r>
+          </a:p>
+        </p:txBody>
+      </p:sp>
+      <p:sp>
+        <p:nvSpPr>
+          <p:cNvPr id="3" name="Content Placeholder 2">
+            <a:extLst>
+              <a:ext uri="{FF2B5EF4-FFF2-40B4-BE49-F238E27FC236}">
+                <a16:creationId xmlns:a16="http://schemas.microsoft.com/office/drawing/2014/main" id="{AFB51B9D-1072-EE37-E024-C516CB3640E0}"/>
+              </a:ext>
+            </a:extLst>
+          </p:cNvPr>
+          <p:cNvSpPr>
+            <a:spLocks noGrp="1"/>
+          </p:cNvSpPr>
+          <p:nvPr>
+            <p:ph idx="1"/>
+          </p:nvPr>
+        </p:nvSpPr>
+        <p:spPr>
+          <a:xfrm>
+            <a:off x="342577" y="2210764"/>
+            <a:ext cx="9299134" cy="1723015"/>
+          </a:xfrm>
+        </p:spPr>
+        <p:txBody>
+          <a:bodyPr anchor="ctr">
+            <a:normAutofit/>
+          </a:bodyPr>
+          <a:lstStyle/>
+          <a:p>
+            <a:pPr marL="0" indent="0">
+              <a:buNone/>
+            </a:pPr>
+            <a:r>
+              <a:rPr lang="en-US" sz="3600" dirty="0"/>
+              <a:t>Heatmaps of any one pollutant, e.g. NOx (GT)</a:t>
+            </a:r>
+          </a:p>
+          <a:p>
+            <a:r>
+              <a:rPr lang="en-US" sz="2400" dirty="0"/>
+              <a:t>More pollution in ‘rush hours’</a:t>
+            </a:r>
+          </a:p>
+          <a:p>
+            <a:r>
+              <a:rPr lang="en-US" sz="2400" dirty="0"/>
+              <a:t>More pollution in cold months</a:t>
+            </a:r>
+            <a:r>
+              <a:rPr lang="en-US" sz="2400" dirty="0">
+                <a:highlight>
+                  <a:srgbClr val="FFFF00"/>
+                </a:highlight>
+              </a:rPr>
+              <a:t>.  (((REDRAW CHARTS???)))</a:t>
+            </a:r>
+          </a:p>
+          <a:p>
+            <a:endParaRPr lang="en-US" sz="3600" dirty="0"/>
+          </a:p>
+          <a:p>
+            <a:endParaRPr lang="en-US" sz="3600" dirty="0"/>
+          </a:p>
+        </p:txBody>
+      </p:sp>
+      <p:pic>
+        <p:nvPicPr>
+          <p:cNvPr id="5" name="Picture 4" descr="A chart of a number of colored squares&#10;&#10;AI-generated content may be incorrect.">
+            <a:extLst>
+              <a:ext uri="{FF2B5EF4-FFF2-40B4-BE49-F238E27FC236}">
+                <a16:creationId xmlns:a16="http://schemas.microsoft.com/office/drawing/2014/main" id="{0DE1D700-19A2-DFA1-6734-C4D1543E5762}"/>
+              </a:ext>
+            </a:extLst>
+          </p:cNvPr>
+          <p:cNvPicPr>
+            <a:picLocks noChangeAspect="1"/>
+          </p:cNvPicPr>
+          <p:nvPr/>
+        </p:nvPicPr>
+        <p:blipFill>
+          <a:blip r:embed="rId2"/>
+          <a:stretch>
+            <a:fillRect/>
+          </a:stretch>
+        </p:blipFill>
+        <p:spPr>
+          <a:xfrm>
+            <a:off x="1574315" y="3429000"/>
+            <a:ext cx="4437811" cy="3273795"/>
+          </a:xfrm>
+          <a:prstGeom prst="rect">
+            <a:avLst/>
+          </a:prstGeom>
+        </p:spPr>
+      </p:pic>
+      <p:pic>
+        <p:nvPicPr>
+          <p:cNvPr id="7" name="Picture 6" descr="A chart of a number of squares&#10;&#10;AI-generated content may be incorrect.">
+            <a:extLst>
+              <a:ext uri="{FF2B5EF4-FFF2-40B4-BE49-F238E27FC236}">
+                <a16:creationId xmlns:a16="http://schemas.microsoft.com/office/drawing/2014/main" id="{707B4F84-6697-FD42-5C91-DE96B5EBC0FD}"/>
+              </a:ext>
+            </a:extLst>
+          </p:cNvPr>
+          <p:cNvPicPr>
+            <a:picLocks noChangeAspect="1"/>
+          </p:cNvPicPr>
+          <p:nvPr/>
+        </p:nvPicPr>
+        <p:blipFill>
+          <a:blip r:embed="rId3"/>
+          <a:stretch>
+            <a:fillRect/>
+          </a:stretch>
+        </p:blipFill>
+        <p:spPr>
+          <a:xfrm>
+            <a:off x="6012126" y="3429000"/>
+            <a:ext cx="4579726" cy="3293114"/>
+          </a:xfrm>
+          <a:prstGeom prst="rect">
+            <a:avLst/>
+          </a:prstGeom>
+        </p:spPr>
+      </p:pic>
+    </p:spTree>
+    <p:extLst>
+      <p:ext uri="{BB962C8B-B14F-4D97-AF65-F5344CB8AC3E}">
+        <p14:creationId xmlns:p14="http://schemas.microsoft.com/office/powerpoint/2010/main" val="3580835498"/>
       </p:ext>
     </p:extLst>
   </p:cSld>
@@ -22820,4 +23007,319 @@
     </a:ext>
   </a:extLst>
 </a:theme>
+</file>
+
+<file path=ppt/theme/theme2.xml><?xml version="1.0" encoding="utf-8"?>
+<a:theme xmlns:a="http://schemas.openxmlformats.org/drawingml/2006/main" name="Office Theme">
+  <a:themeElements>
+    <a:clrScheme name="Office">
+      <a:dk1>
+        <a:sysClr val="windowText" lastClr="000000"/>
+      </a:dk1>
+      <a:lt1>
+        <a:sysClr val="window" lastClr="FFFFFF"/>
+      </a:lt1>
+      <a:dk2>
+        <a:srgbClr val="0E2841"/>
+      </a:dk2>
+      <a:lt2>
+        <a:srgbClr val="E8E8E8"/>
+      </a:lt2>
+      <a:accent1>
+        <a:srgbClr val="156082"/>
+      </a:accent1>
+      <a:accent2>
+        <a:srgbClr val="E97132"/>
+      </a:accent2>
+      <a:accent3>
+        <a:srgbClr val="196B24"/>
+      </a:accent3>
+      <a:accent4>
+        <a:srgbClr val="0F9ED5"/>
+      </a:accent4>
+      <a:accent5>
+        <a:srgbClr val="A02B93"/>
+      </a:accent5>
+      <a:accent6>
+        <a:srgbClr val="4EA72E"/>
+      </a:accent6>
+      <a:hlink>
+        <a:srgbClr val="467886"/>
+      </a:hlink>
+      <a:folHlink>
+        <a:srgbClr val="96607D"/>
+      </a:folHlink>
+    </a:clrScheme>
+    <a:fontScheme name="Office">
+      <a:majorFont>
+        <a:latin typeface="Aptos Display" panose="02110004020202020204"/>
+        <a:ea typeface=""/>
+        <a:cs typeface=""/>
+        <a:font script="Jpan" typeface="游ゴシック Light"/>
+        <a:font script="Hang" typeface="맑은 고딕"/>
+        <a:font script="Hans" typeface="等线 Light"/>
+        <a:font script="Hant" typeface="新細明體"/>
+        <a:font script="Arab" typeface="Times New Roman"/>
+        <a:font script="Hebr" typeface="Times New Roman"/>
+        <a:font script="Thai" typeface="Angsana New"/>
+        <a:font script="Ethi" typeface="Nyala"/>
+        <a:font script="Beng" typeface="Vrinda"/>
+        <a:font script="Gujr" typeface="Shruti"/>
+        <a:font script="Khmr" typeface="MoolBoran"/>
+        <a:font script="Knda" typeface="Tunga"/>
+        <a:font script="Guru" typeface="Raavi"/>
+        <a:font script="Cans" typeface="Euphemia"/>
+        <a:font script="Cher" typeface="Plantagenet Cherokee"/>
+        <a:font script="Yiii" typeface="Microsoft Yi Baiti"/>
+        <a:font script="Tibt" typeface="Microsoft Himalaya"/>
+        <a:font script="Thaa" typeface="MV Boli"/>
+        <a:font script="Deva" typeface="Mangal"/>
+        <a:font script="Telu" typeface="Gautami"/>
+        <a:font script="Taml" typeface="Latha"/>
+        <a:font script="Syrc" typeface="Estrangelo Edessa"/>
+        <a:font script="Orya" typeface="Kalinga"/>
+        <a:font script="Mlym" typeface="Kartika"/>
+        <a:font script="Laoo" typeface="DokChampa"/>
+        <a:font script="Sinh" typeface="Iskoola Pota"/>
+        <a:font script="Mong" typeface="Mongolian Baiti"/>
+        <a:font script="Viet" typeface="Times New Roman"/>
+        <a:font script="Uigh" typeface="Microsoft Uighur"/>
+        <a:font script="Geor" typeface="Sylfaen"/>
+        <a:font script="Armn" typeface="Arial"/>
+        <a:font script="Bugi" typeface="Leelawadee UI"/>
+        <a:font script="Bopo" typeface="Microsoft JhengHei"/>
+        <a:font script="Java" typeface="Javanese Text"/>
+        <a:font script="Lisu" typeface="Segoe UI"/>
+        <a:font script="Mymr" typeface="Myanmar Text"/>
+        <a:font script="Nkoo" typeface="Ebrima"/>
+        <a:font script="Olck" typeface="Nirmala UI"/>
+        <a:font script="Osma" typeface="Ebrima"/>
+        <a:font script="Phag" typeface="Phagspa"/>
+        <a:font script="Syrn" typeface="Estrangelo Edessa"/>
+        <a:font script="Syrj" typeface="Estrangelo Edessa"/>
+        <a:font script="Syre" typeface="Estrangelo Edessa"/>
+        <a:font script="Sora" typeface="Nirmala UI"/>
+        <a:font script="Tale" typeface="Microsoft Tai Le"/>
+        <a:font script="Talu" typeface="Microsoft New Tai Lue"/>
+        <a:font script="Tfng" typeface="Ebrima"/>
+      </a:majorFont>
+      <a:minorFont>
+        <a:latin typeface="Aptos" panose="02110004020202020204"/>
+        <a:ea typeface=""/>
+        <a:cs typeface=""/>
+        <a:font script="Jpan" typeface="游ゴシック"/>
+        <a:font script="Hang" typeface="맑은 고딕"/>
+        <a:font script="Hans" typeface="等线"/>
+        <a:font script="Hant" typeface="新細明體"/>
+        <a:font script="Arab" typeface="Arial"/>
+        <a:font script="Hebr" typeface="Arial"/>
+        <a:font script="Thai" typeface="Cordia New"/>
+        <a:font script="Ethi" typeface="Nyala"/>
+        <a:font script="Beng" typeface="Vrinda"/>
+        <a:font script="Gujr" typeface="Shruti"/>
+        <a:font script="Khmr" typeface="DaunPenh"/>
+        <a:font script="Knda" typeface="Tunga"/>
+        <a:font script="Guru" typeface="Raavi"/>
+        <a:font script="Cans" typeface="Euphemia"/>
+        <a:font script="Cher" typeface="Plantagenet Cherokee"/>
+        <a:font script="Yiii" typeface="Microsoft Yi Baiti"/>
+        <a:font script="Tibt" typeface="Microsoft Himalaya"/>
+        <a:font script="Thaa" typeface="MV Boli"/>
+        <a:font script="Deva" typeface="Mangal"/>
+        <a:font script="Telu" typeface="Gautami"/>
+        <a:font script="Taml" typeface="Latha"/>
+        <a:font script="Syrc" typeface="Estrangelo Edessa"/>
+        <a:font script="Orya" typeface="Kalinga"/>
+        <a:font script="Mlym" typeface="Kartika"/>
+        <a:font script="Laoo" typeface="DokChampa"/>
+        <a:font script="Sinh" typeface="Iskoola Pota"/>
+        <a:font script="Mong" typeface="Mongolian Baiti"/>
+        <a:font script="Viet" typeface="Arial"/>
+        <a:font script="Uigh" typeface="Microsoft Uighur"/>
+        <a:font script="Geor" typeface="Sylfaen"/>
+        <a:font script="Armn" typeface="Arial"/>
+        <a:font script="Bugi" typeface="Leelawadee UI"/>
+        <a:font script="Bopo" typeface="Microsoft JhengHei"/>
+        <a:font script="Java" typeface="Javanese Text"/>
+        <a:font script="Lisu" typeface="Segoe UI"/>
+        <a:font script="Mymr" typeface="Myanmar Text"/>
+        <a:font script="Nkoo" typeface="Ebrima"/>
+        <a:font script="Olck" typeface="Nirmala UI"/>
+        <a:font script="Osma" typeface="Ebrima"/>
+        <a:font script="Phag" typeface="Phagspa"/>
+        <a:font script="Syrn" typeface="Estrangelo Edessa"/>
+        <a:font script="Syrj" typeface="Estrangelo Edessa"/>
+        <a:font script="Syre" typeface="Estrangelo Edessa"/>
+        <a:font script="Sora" typeface="Nirmala UI"/>
+        <a:font script="Tale" typeface="Microsoft Tai Le"/>
+        <a:font script="Talu" typeface="Microsoft New Tai Lue"/>
+        <a:font script="Tfng" typeface="Ebrima"/>
+      </a:minorFont>
+    </a:fontScheme>
+    <a:fmtScheme name="Office">
+      <a:fillStyleLst>
+        <a:solidFill>
+          <a:schemeClr val="phClr"/>
+        </a:solidFill>
+        <a:gradFill rotWithShape="1">
+          <a:gsLst>
+            <a:gs pos="0">
+              <a:schemeClr val="phClr">
+                <a:lumMod val="110000"/>
+                <a:satMod val="105000"/>
+                <a:tint val="67000"/>
+              </a:schemeClr>
+            </a:gs>
+            <a:gs pos="50000">
+              <a:schemeClr val="phClr">
+                <a:lumMod val="105000"/>
+                <a:satMod val="103000"/>
+                <a:tint val="73000"/>
+              </a:schemeClr>
+            </a:gs>
+            <a:gs pos="100000">
+              <a:schemeClr val="phClr">
+                <a:lumMod val="105000"/>
+                <a:satMod val="109000"/>
+                <a:tint val="81000"/>
+              </a:schemeClr>
+            </a:gs>
+          </a:gsLst>
+          <a:lin ang="5400000" scaled="0"/>
+        </a:gradFill>
+        <a:gradFill rotWithShape="1">
+          <a:gsLst>
+            <a:gs pos="0">
+              <a:schemeClr val="phClr">
+                <a:satMod val="103000"/>
+                <a:lumMod val="102000"/>
+                <a:tint val="94000"/>
+              </a:schemeClr>
+            </a:gs>
+            <a:gs pos="50000">
+              <a:schemeClr val="phClr">
+                <a:satMod val="110000"/>
+                <a:lumMod val="100000"/>
+                <a:shade val="100000"/>
+              </a:schemeClr>
+            </a:gs>
+            <a:gs pos="100000">
+              <a:schemeClr val="phClr">
+                <a:lumMod val="99000"/>
+                <a:satMod val="120000"/>
+                <a:shade val="78000"/>
+              </a:schemeClr>
+            </a:gs>
+          </a:gsLst>
+          <a:lin ang="5400000" scaled="0"/>
+        </a:gradFill>
+      </a:fillStyleLst>
+      <a:lnStyleLst>
+        <a:ln w="12700" cap="flat" cmpd="sng" algn="ctr">
+          <a:solidFill>
+            <a:schemeClr val="phClr"/>
+          </a:solidFill>
+          <a:prstDash val="solid"/>
+          <a:miter lim="800000"/>
+        </a:ln>
+        <a:ln w="19050" cap="flat" cmpd="sng" algn="ctr">
+          <a:solidFill>
+            <a:schemeClr val="phClr"/>
+          </a:solidFill>
+          <a:prstDash val="solid"/>
+          <a:miter lim="800000"/>
+        </a:ln>
+        <a:ln w="25400" cap="flat" cmpd="sng" algn="ctr">
+          <a:solidFill>
+            <a:schemeClr val="phClr"/>
+          </a:solidFill>
+          <a:prstDash val="solid"/>
+          <a:miter lim="800000"/>
+        </a:ln>
+      </a:lnStyleLst>
+      <a:effectStyleLst>
+        <a:effectStyle>
+          <a:effectLst/>
+        </a:effectStyle>
+        <a:effectStyle>
+          <a:effectLst/>
+        </a:effectStyle>
+        <a:effectStyle>
+          <a:effectLst>
+            <a:outerShdw blurRad="57150" dist="19050" dir="5400000" algn="ctr" rotWithShape="0">
+              <a:srgbClr val="000000">
+                <a:alpha val="63000"/>
+              </a:srgbClr>
+            </a:outerShdw>
+          </a:effectLst>
+        </a:effectStyle>
+      </a:effectStyleLst>
+      <a:bgFillStyleLst>
+        <a:solidFill>
+          <a:schemeClr val="phClr"/>
+        </a:solidFill>
+        <a:solidFill>
+          <a:schemeClr val="phClr">
+            <a:tint val="95000"/>
+            <a:satMod val="170000"/>
+          </a:schemeClr>
+        </a:solidFill>
+        <a:gradFill rotWithShape="1">
+          <a:gsLst>
+            <a:gs pos="0">
+              <a:schemeClr val="phClr">
+                <a:tint val="93000"/>
+                <a:satMod val="150000"/>
+                <a:shade val="98000"/>
+                <a:lumMod val="102000"/>
+              </a:schemeClr>
+            </a:gs>
+            <a:gs pos="50000">
+              <a:schemeClr val="phClr">
+                <a:tint val="98000"/>
+                <a:satMod val="130000"/>
+                <a:shade val="90000"/>
+                <a:lumMod val="103000"/>
+              </a:schemeClr>
+            </a:gs>
+            <a:gs pos="100000">
+              <a:schemeClr val="phClr">
+                <a:shade val="63000"/>
+                <a:satMod val="120000"/>
+              </a:schemeClr>
+            </a:gs>
+          </a:gsLst>
+          <a:lin ang="5400000" scaled="0"/>
+        </a:gradFill>
+      </a:bgFillStyleLst>
+    </a:fmtScheme>
+  </a:themeElements>
+  <a:objectDefaults>
+    <a:lnDef>
+      <a:spPr/>
+      <a:bodyPr/>
+      <a:lstStyle/>
+      <a:style>
+        <a:lnRef idx="2">
+          <a:schemeClr val="accent1"/>
+        </a:lnRef>
+        <a:fillRef idx="0">
+          <a:schemeClr val="accent1"/>
+        </a:fillRef>
+        <a:effectRef idx="1">
+          <a:schemeClr val="accent1"/>
+        </a:effectRef>
+        <a:fontRef idx="minor">
+          <a:schemeClr val="tx1"/>
+        </a:fontRef>
+      </a:style>
+    </a:lnDef>
+  </a:objectDefaults>
+  <a:extraClrSchemeLst/>
+  <a:extLst>
+    <a:ext uri="{05A4C25C-085E-4340-85A3-A5531E510DB2}">
+      <thm15:themeFamily xmlns:thm15="http://schemas.microsoft.com/office/thememl/2012/main" name="Office Theme" id="{2E142A2C-CD16-42D6-873A-C26D2A0506FA}" vid="{1BDDFF52-6CD6-40A5-AB3C-68EB2F1E4D0A}"/>
+    </a:ext>
+  </a:extLst>
+</a:theme>
 </file>